--- a/Churn_Analysis_Presentation-zheng 02-20.pptx
+++ b/Churn_Analysis_Presentation-zheng 02-20.pptx
@@ -5,24 +5,25 @@
     <p:sldMasterId id="2147483648" r:id="rId1"/>
   </p:sldMasterIdLst>
   <p:notesMasterIdLst>
-    <p:notesMasterId r:id="rId17"/>
+    <p:notesMasterId r:id="rId18"/>
   </p:notesMasterIdLst>
   <p:sldIdLst>
     <p:sldId id="256" r:id="rId2"/>
     <p:sldId id="257" r:id="rId3"/>
     <p:sldId id="258" r:id="rId4"/>
-    <p:sldId id="259" r:id="rId5"/>
-    <p:sldId id="260" r:id="rId6"/>
-    <p:sldId id="261" r:id="rId7"/>
-    <p:sldId id="262" r:id="rId8"/>
-    <p:sldId id="263" r:id="rId9"/>
-    <p:sldId id="264" r:id="rId10"/>
-    <p:sldId id="265" r:id="rId11"/>
-    <p:sldId id="266" r:id="rId12"/>
-    <p:sldId id="269" r:id="rId13"/>
-    <p:sldId id="267" r:id="rId14"/>
-    <p:sldId id="268" r:id="rId15"/>
-    <p:sldId id="270" r:id="rId16"/>
+    <p:sldId id="271" r:id="rId5"/>
+    <p:sldId id="259" r:id="rId6"/>
+    <p:sldId id="260" r:id="rId7"/>
+    <p:sldId id="261" r:id="rId8"/>
+    <p:sldId id="262" r:id="rId9"/>
+    <p:sldId id="263" r:id="rId10"/>
+    <p:sldId id="264" r:id="rId11"/>
+    <p:sldId id="265" r:id="rId12"/>
+    <p:sldId id="266" r:id="rId13"/>
+    <p:sldId id="269" r:id="rId14"/>
+    <p:sldId id="267" r:id="rId15"/>
+    <p:sldId id="268" r:id="rId16"/>
+    <p:sldId id="270" r:id="rId17"/>
   </p:sldIdLst>
   <p:sldSz cx="9144000" cy="5143500" type="screen16x9"/>
   <p:notesSz cx="5143500" cy="9144000"/>
@@ -568,7 +569,91 @@
           <a:p>
             <a:fld id="{F7021451-1387-4CA6-816F-3879F97B5CBC}" type="slidenum">
               <a:rPr lang="en-US"/>
-              <a:t>13</a:t>
+              <a:t>12</a:t>
+            </a:fld>
+            <a:endParaRPr lang="en-US"/>
+          </a:p>
+        </p:txBody>
+      </p:sp>
+    </p:spTree>
+    <p:extLst>
+      <p:ext uri="{BB962C8B-B14F-4D97-AF65-F5344CB8AC3E}">
+        <p14:creationId xmlns:p14="http://schemas.microsoft.com/office/powerpoint/2010/main" val="1024086991"/>
+      </p:ext>
+    </p:extLst>
+  </p:cSld>
+  <p:clrMapOvr>
+    <a:masterClrMapping/>
+  </p:clrMapOvr>
+</p:notes>
+</file>
+
+<file path=ppt/notesSlides/notesSlide13.xml><?xml version="1.0" encoding="utf-8"?>
+<p:notes xmlns:a="http://schemas.openxmlformats.org/drawingml/2006/main" xmlns:r="http://schemas.openxmlformats.org/officeDocument/2006/relationships" xmlns:p="http://schemas.openxmlformats.org/presentationml/2006/main">
+  <p:cSld>
+    <p:spTree>
+      <p:nvGrpSpPr>
+        <p:cNvPr id="1" name=""/>
+        <p:cNvGrpSpPr/>
+        <p:nvPr/>
+      </p:nvGrpSpPr>
+      <p:grpSpPr>
+        <a:xfrm>
+          <a:off x="0" y="0"/>
+          <a:ext cx="0" cy="0"/>
+          <a:chOff x="0" y="0"/>
+          <a:chExt cx="0" cy="0"/>
+        </a:xfrm>
+      </p:grpSpPr>
+      <p:sp>
+        <p:nvSpPr>
+          <p:cNvPr id="2" name="Slide Image Placeholder 1"/>
+          <p:cNvSpPr>
+            <a:spLocks noGrp="1" noRot="1" noChangeAspect="1"/>
+          </p:cNvSpPr>
+          <p:nvPr>
+            <p:ph type="sldImg"/>
+          </p:nvPr>
+        </p:nvSpPr>
+        <p:spPr/>
+      </p:sp>
+      <p:sp>
+        <p:nvSpPr>
+          <p:cNvPr id="3" name="Notes Placeholder 2"/>
+          <p:cNvSpPr>
+            <a:spLocks noGrp="1"/>
+          </p:cNvSpPr>
+          <p:nvPr>
+            <p:ph type="body" idx="1"/>
+          </p:nvPr>
+        </p:nvSpPr>
+        <p:spPr/>
+        <p:txBody>
+          <a:bodyPr/>
+          <a:lstStyle/>
+          <a:p>
+            <a:endParaRPr lang="en-US" dirty="0"/>
+          </a:p>
+        </p:txBody>
+      </p:sp>
+      <p:sp>
+        <p:nvSpPr>
+          <p:cNvPr id="4" name="Slide Number Placeholder 3"/>
+          <p:cNvSpPr>
+            <a:spLocks noGrp="1"/>
+          </p:cNvSpPr>
+          <p:nvPr>
+            <p:ph type="sldNum" sz="quarter" idx="10"/>
+          </p:nvPr>
+        </p:nvSpPr>
+        <p:spPr/>
+        <p:txBody>
+          <a:bodyPr/>
+          <a:lstStyle/>
+          <a:p>
+            <a:fld id="{F7021451-1387-4CA6-816F-3879F97B5CBC}" type="slidenum">
+              <a:rPr lang="en-US"/>
+              <a:t>14</a:t>
             </a:fld>
             <a:endParaRPr lang="en-US"/>
           </a:p>
@@ -760,7 +845,13 @@
   <p:cSld>
     <p:spTree>
       <p:nvGrpSpPr>
-        <p:cNvPr id="1" name=""/>
+        <p:cNvPr id="1" name="">
+          <a:extLst>
+            <a:ext uri="{FF2B5EF4-FFF2-40B4-BE49-F238E27FC236}">
+              <a16:creationId xmlns:a16="http://schemas.microsoft.com/office/drawing/2014/main" id="{FDA680A3-33BE-94CC-783C-C5AD91B4D71F}"/>
+            </a:ext>
+          </a:extLst>
+        </p:cNvPr>
         <p:cNvGrpSpPr/>
         <p:nvPr/>
       </p:nvGrpSpPr>
@@ -774,7 +865,13 @@
       </p:grpSpPr>
       <p:sp>
         <p:nvSpPr>
-          <p:cNvPr id="2" name="Slide Image Placeholder 1"/>
+          <p:cNvPr id="2" name="Slide Image Placeholder 1">
+            <a:extLst>
+              <a:ext uri="{FF2B5EF4-FFF2-40B4-BE49-F238E27FC236}">
+                <a16:creationId xmlns:a16="http://schemas.microsoft.com/office/drawing/2014/main" id="{27E3BF77-9B45-7019-8C86-C3DE3BDDF2F4}"/>
+              </a:ext>
+            </a:extLst>
+          </p:cNvPr>
           <p:cNvSpPr>
             <a:spLocks noGrp="1" noRot="1" noChangeAspect="1"/>
           </p:cNvSpPr>
@@ -786,7 +883,13 @@
       </p:sp>
       <p:sp>
         <p:nvSpPr>
-          <p:cNvPr id="3" name="Notes Placeholder 2"/>
+          <p:cNvPr id="3" name="Notes Placeholder 2">
+            <a:extLst>
+              <a:ext uri="{FF2B5EF4-FFF2-40B4-BE49-F238E27FC236}">
+                <a16:creationId xmlns:a16="http://schemas.microsoft.com/office/drawing/2014/main" id="{8AD400EE-B984-3DFD-258F-006174241B55}"/>
+              </a:ext>
+            </a:extLst>
+          </p:cNvPr>
           <p:cNvSpPr>
             <a:spLocks noGrp="1"/>
           </p:cNvSpPr>
@@ -805,7 +908,13 @@
       </p:sp>
       <p:sp>
         <p:nvSpPr>
-          <p:cNvPr id="4" name="Slide Number Placeholder 3"/>
+          <p:cNvPr id="4" name="Slide Number Placeholder 3">
+            <a:extLst>
+              <a:ext uri="{FF2B5EF4-FFF2-40B4-BE49-F238E27FC236}">
+                <a16:creationId xmlns:a16="http://schemas.microsoft.com/office/drawing/2014/main" id="{A0874F8A-E5E1-4D50-72B8-9BFD792EF5C5}"/>
+              </a:ext>
+            </a:extLst>
+          </p:cNvPr>
           <p:cNvSpPr>
             <a:spLocks noGrp="1"/>
           </p:cNvSpPr>
@@ -829,7 +938,7 @@
     </p:spTree>
     <p:extLst>
       <p:ext uri="{BB962C8B-B14F-4D97-AF65-F5344CB8AC3E}">
-        <p14:creationId xmlns:p14="http://schemas.microsoft.com/office/powerpoint/2010/main" val="1024086991"/>
+        <p14:creationId xmlns:p14="http://schemas.microsoft.com/office/powerpoint/2010/main" val="2977069474"/>
       </p:ext>
     </p:extLst>
   </p:cSld>
@@ -2382,6 +2491,661 @@
 
 <file path=ppt/slides/slide10.xml><?xml version="1.0" encoding="utf-8"?>
 <p:sld xmlns:a="http://schemas.openxmlformats.org/drawingml/2006/main" xmlns:r="http://schemas.openxmlformats.org/officeDocument/2006/relationships" xmlns:p="http://schemas.openxmlformats.org/presentationml/2006/main">
+  <p:cSld name="Slide 9">
+    <p:bg>
+      <p:bgPr>
+        <a:solidFill>
+          <a:srgbClr val="FAFBFD"/>
+        </a:solidFill>
+        <a:effectLst/>
+      </p:bgPr>
+    </p:bg>
+    <p:spTree>
+      <p:nvGrpSpPr>
+        <p:cNvPr id="1" name=""/>
+        <p:cNvGrpSpPr/>
+        <p:nvPr/>
+      </p:nvGrpSpPr>
+      <p:grpSpPr>
+        <a:xfrm>
+          <a:off x="0" y="0"/>
+          <a:ext cx="0" cy="0"/>
+          <a:chOff x="0" y="0"/>
+          <a:chExt cx="0" cy="0"/>
+        </a:xfrm>
+      </p:grpSpPr>
+      <p:sp>
+        <p:nvSpPr>
+          <p:cNvPr id="2" name="Shape 0"/>
+          <p:cNvSpPr/>
+          <p:nvPr/>
+        </p:nvSpPr>
+        <p:spPr>
+          <a:xfrm>
+            <a:off x="0" y="0"/>
+            <a:ext cx="9144000" cy="1005840"/>
+          </a:xfrm>
+          <a:prstGeom prst="rect">
+            <a:avLst/>
+          </a:prstGeom>
+          <a:solidFill>
+            <a:srgbClr val="1C4B82"/>
+          </a:solidFill>
+          <a:ln/>
+        </p:spPr>
+        <p:txBody>
+          <a:bodyPr/>
+          <a:lstStyle/>
+          <a:p>
+            <a:endParaRPr lang="en-GB"/>
+          </a:p>
+        </p:txBody>
+      </p:sp>
+      <p:sp>
+        <p:nvSpPr>
+          <p:cNvPr id="3" name="Text 1"/>
+          <p:cNvSpPr/>
+          <p:nvPr/>
+        </p:nvSpPr>
+        <p:spPr>
+          <a:xfrm>
+            <a:off x="365760" y="137160"/>
+            <a:ext cx="8412480" cy="777240"/>
+          </a:xfrm>
+          <a:prstGeom prst="rect">
+            <a:avLst/>
+          </a:prstGeom>
+          <a:noFill/>
+          <a:ln/>
+        </p:spPr>
+        <p:txBody>
+          <a:bodyPr wrap="square" lIns="0" tIns="0" rIns="0" bIns="0" rtlCol="0" anchor="ctr"/>
+          <a:lstStyle/>
+          <a:p>
+            <a:pPr marL="0" indent="0">
+              <a:buNone/>
+            </a:pPr>
+            <a:r>
+              <a:rPr lang="en-US" sz="2800" b="1" dirty="0">
+                <a:solidFill>
+                  <a:srgbClr val="FFFFFF"/>
+                </a:solidFill>
+                <a:latin typeface="Calibri" pitchFamily="34" charset="0"/>
+                <a:ea typeface="Calibri" pitchFamily="34" charset="-122"/>
+                <a:cs typeface="Calibri" pitchFamily="34" charset="-120"/>
+              </a:rPr>
+              <a:t>Model Summary</a:t>
+            </a:r>
+            <a:endParaRPr lang="en-US" sz="2800" dirty="0"/>
+          </a:p>
+        </p:txBody>
+      </p:sp>
+      <p:sp>
+        <p:nvSpPr>
+          <p:cNvPr id="4" name="Text 2"/>
+          <p:cNvSpPr/>
+          <p:nvPr/>
+        </p:nvSpPr>
+        <p:spPr>
+          <a:xfrm>
+            <a:off x="274320" y="1051560"/>
+            <a:ext cx="8595360" cy="347472"/>
+          </a:xfrm>
+          <a:prstGeom prst="rect">
+            <a:avLst/>
+          </a:prstGeom>
+          <a:noFill/>
+          <a:ln/>
+        </p:spPr>
+        <p:txBody>
+          <a:bodyPr wrap="square" lIns="0" tIns="0" rIns="0" bIns="0" rtlCol="0" anchor="ctr"/>
+          <a:lstStyle/>
+          <a:p>
+            <a:pPr marL="0" indent="0" algn="ctr">
+              <a:buNone/>
+            </a:pPr>
+            <a:r>
+              <a:rPr lang="en-US" sz="1400" b="1" dirty="0">
+                <a:solidFill>
+                  <a:srgbClr val="1C4B82"/>
+                </a:solidFill>
+                <a:latin typeface="Calibri" pitchFamily="34" charset="0"/>
+                <a:ea typeface="Calibri" pitchFamily="34" charset="-122"/>
+                <a:cs typeface="Calibri" pitchFamily="34" charset="-120"/>
+              </a:rPr>
+              <a:t>Predictor Coefficients — Full Logistic Regression Model</a:t>
+            </a:r>
+            <a:endParaRPr lang="en-US" sz="1400" dirty="0"/>
+          </a:p>
+        </p:txBody>
+      </p:sp>
+      <p:pic>
+        <p:nvPicPr>
+          <p:cNvPr id="5" name="Image 0" descr="preencoded.png"/>
+          <p:cNvPicPr>
+            <a:picLocks noChangeAspect="1"/>
+          </p:cNvPicPr>
+          <p:nvPr/>
+        </p:nvPicPr>
+        <p:blipFill>
+          <a:blip r:embed="rId3"/>
+          <a:stretch>
+            <a:fillRect/>
+          </a:stretch>
+        </p:blipFill>
+        <p:spPr>
+          <a:xfrm>
+            <a:off x="548640" y="1417320"/>
+            <a:ext cx="5486400" cy="3566160"/>
+          </a:xfrm>
+          <a:prstGeom prst="rect">
+            <a:avLst/>
+          </a:prstGeom>
+        </p:spPr>
+      </p:pic>
+      <p:sp>
+        <p:nvSpPr>
+          <p:cNvPr id="6" name="Shape 3"/>
+          <p:cNvSpPr/>
+          <p:nvPr/>
+        </p:nvSpPr>
+        <p:spPr>
+          <a:xfrm>
+            <a:off x="6263640" y="1417320"/>
+            <a:ext cx="2651760" cy="3566160"/>
+          </a:xfrm>
+          <a:prstGeom prst="rect">
+            <a:avLst/>
+          </a:prstGeom>
+          <a:solidFill>
+            <a:srgbClr val="FFFFFF"/>
+          </a:solidFill>
+          <a:ln w="12700">
+            <a:solidFill>
+              <a:srgbClr val="CBD5E1"/>
+            </a:solidFill>
+            <a:prstDash val="solid"/>
+          </a:ln>
+          <a:effectLst>
+            <a:outerShdw blurRad="101600" dist="38100" dir="8100000" algn="bl" rotWithShape="0">
+              <a:srgbClr val="000000">
+                <a:alpha val="12000"/>
+              </a:srgbClr>
+            </a:outerShdw>
+          </a:effectLst>
+        </p:spPr>
+        <p:txBody>
+          <a:bodyPr/>
+          <a:lstStyle/>
+          <a:p>
+            <a:endParaRPr lang="en-GB"/>
+          </a:p>
+        </p:txBody>
+      </p:sp>
+      <p:sp>
+        <p:nvSpPr>
+          <p:cNvPr id="7" name="Shape 4"/>
+          <p:cNvSpPr/>
+          <p:nvPr/>
+        </p:nvSpPr>
+        <p:spPr>
+          <a:xfrm>
+            <a:off x="6263640" y="1417320"/>
+            <a:ext cx="2651760" cy="384048"/>
+          </a:xfrm>
+          <a:prstGeom prst="rect">
+            <a:avLst/>
+          </a:prstGeom>
+          <a:solidFill>
+            <a:srgbClr val="1C4B82"/>
+          </a:solidFill>
+          <a:ln/>
+        </p:spPr>
+        <p:txBody>
+          <a:bodyPr/>
+          <a:lstStyle/>
+          <a:p>
+            <a:endParaRPr lang="en-GB"/>
+          </a:p>
+        </p:txBody>
+      </p:sp>
+      <p:sp>
+        <p:nvSpPr>
+          <p:cNvPr id="8" name="Text 5"/>
+          <p:cNvSpPr/>
+          <p:nvPr/>
+        </p:nvSpPr>
+        <p:spPr>
+          <a:xfrm>
+            <a:off x="6355080" y="1435608"/>
+            <a:ext cx="2468880" cy="347472"/>
+          </a:xfrm>
+          <a:prstGeom prst="rect">
+            <a:avLst/>
+          </a:prstGeom>
+          <a:noFill/>
+          <a:ln/>
+        </p:spPr>
+        <p:txBody>
+          <a:bodyPr wrap="square" lIns="0" tIns="0" rIns="0" bIns="0" rtlCol="0" anchor="ctr"/>
+          <a:lstStyle/>
+          <a:p>
+            <a:pPr marL="0" indent="0">
+              <a:buNone/>
+            </a:pPr>
+            <a:r>
+              <a:rPr lang="en-US" sz="1200" b="1" dirty="0">
+                <a:solidFill>
+                  <a:srgbClr val="FFFFFF"/>
+                </a:solidFill>
+                <a:latin typeface="Calibri" pitchFamily="34" charset="0"/>
+                <a:ea typeface="Calibri" pitchFamily="34" charset="-122"/>
+                <a:cs typeface="Calibri" pitchFamily="34" charset="-120"/>
+              </a:rPr>
+              <a:t>How to Read</a:t>
+            </a:r>
+            <a:endParaRPr lang="en-US" sz="1200" dirty="0"/>
+          </a:p>
+        </p:txBody>
+      </p:sp>
+      <p:sp>
+        <p:nvSpPr>
+          <p:cNvPr id="9" name="Shape 6"/>
+          <p:cNvSpPr/>
+          <p:nvPr/>
+        </p:nvSpPr>
+        <p:spPr>
+          <a:xfrm>
+            <a:off x="6400800" y="1920240"/>
+            <a:ext cx="201168" cy="347472"/>
+          </a:xfrm>
+          <a:prstGeom prst="rect">
+            <a:avLst/>
+          </a:prstGeom>
+          <a:solidFill>
+            <a:srgbClr val="E84A5F"/>
+          </a:solidFill>
+          <a:ln w="12700">
+            <a:solidFill>
+              <a:srgbClr val="E84A5F"/>
+            </a:solidFill>
+            <a:prstDash val="solid"/>
+          </a:ln>
+        </p:spPr>
+        <p:txBody>
+          <a:bodyPr/>
+          <a:lstStyle/>
+          <a:p>
+            <a:endParaRPr lang="en-GB"/>
+          </a:p>
+        </p:txBody>
+      </p:sp>
+      <p:sp>
+        <p:nvSpPr>
+          <p:cNvPr id="10" name="Text 7"/>
+          <p:cNvSpPr/>
+          <p:nvPr/>
+        </p:nvSpPr>
+        <p:spPr>
+          <a:xfrm>
+            <a:off x="6675120" y="1920240"/>
+            <a:ext cx="2148840" cy="530352"/>
+          </a:xfrm>
+          <a:prstGeom prst="rect">
+            <a:avLst/>
+          </a:prstGeom>
+          <a:noFill/>
+          <a:ln/>
+        </p:spPr>
+        <p:txBody>
+          <a:bodyPr wrap="square" lIns="0" tIns="0" rIns="0" bIns="0" rtlCol="0" anchor="ctr"/>
+          <a:lstStyle/>
+          <a:p>
+            <a:pPr marL="0" indent="0">
+              <a:buNone/>
+            </a:pPr>
+            <a:r>
+              <a:rPr lang="en-US" sz="1050" dirty="0">
+                <a:solidFill>
+                  <a:srgbClr val="1A1A2E"/>
+                </a:solidFill>
+                <a:latin typeface="Calibri" pitchFamily="34" charset="0"/>
+                <a:ea typeface="Calibri" pitchFamily="34" charset="-122"/>
+                <a:cs typeface="Calibri" pitchFamily="34" charset="-120"/>
+              </a:rPr>
+              <a:t>Red bars (positive): predictor increases churn probability</a:t>
+            </a:r>
+            <a:endParaRPr lang="en-US" sz="1050" dirty="0"/>
+          </a:p>
+        </p:txBody>
+      </p:sp>
+      <p:sp>
+        <p:nvSpPr>
+          <p:cNvPr id="11" name="Shape 8"/>
+          <p:cNvSpPr/>
+          <p:nvPr/>
+        </p:nvSpPr>
+        <p:spPr>
+          <a:xfrm>
+            <a:off x="6400800" y="2578608"/>
+            <a:ext cx="201168" cy="347472"/>
+          </a:xfrm>
+          <a:prstGeom prst="rect">
+            <a:avLst/>
+          </a:prstGeom>
+          <a:solidFill>
+            <a:srgbClr val="1C4B82"/>
+          </a:solidFill>
+          <a:ln w="12700">
+            <a:solidFill>
+              <a:srgbClr val="1C4B82"/>
+            </a:solidFill>
+            <a:prstDash val="solid"/>
+          </a:ln>
+        </p:spPr>
+        <p:txBody>
+          <a:bodyPr/>
+          <a:lstStyle/>
+          <a:p>
+            <a:endParaRPr lang="en-GB"/>
+          </a:p>
+        </p:txBody>
+      </p:sp>
+      <p:sp>
+        <p:nvSpPr>
+          <p:cNvPr id="12" name="Text 9"/>
+          <p:cNvSpPr/>
+          <p:nvPr/>
+        </p:nvSpPr>
+        <p:spPr>
+          <a:xfrm>
+            <a:off x="6675120" y="2578608"/>
+            <a:ext cx="2148840" cy="530352"/>
+          </a:xfrm>
+          <a:prstGeom prst="rect">
+            <a:avLst/>
+          </a:prstGeom>
+          <a:noFill/>
+          <a:ln/>
+        </p:spPr>
+        <p:txBody>
+          <a:bodyPr wrap="square" lIns="0" tIns="0" rIns="0" bIns="0" rtlCol="0" anchor="ctr"/>
+          <a:lstStyle/>
+          <a:p>
+            <a:pPr marL="0" indent="0">
+              <a:buNone/>
+            </a:pPr>
+            <a:r>
+              <a:rPr lang="en-US" sz="1050" dirty="0">
+                <a:solidFill>
+                  <a:srgbClr val="1A1A2E"/>
+                </a:solidFill>
+                <a:latin typeface="Calibri" pitchFamily="34" charset="0"/>
+                <a:ea typeface="Calibri" pitchFamily="34" charset="-122"/>
+                <a:cs typeface="Calibri" pitchFamily="34" charset="-120"/>
+              </a:rPr>
+              <a:t>Blue bars (negative): predictor reduces churn probability</a:t>
+            </a:r>
+            <a:endParaRPr lang="en-US" sz="1050" dirty="0"/>
+          </a:p>
+        </p:txBody>
+      </p:sp>
+      <p:sp>
+        <p:nvSpPr>
+          <p:cNvPr id="13" name="Shape 10"/>
+          <p:cNvSpPr/>
+          <p:nvPr/>
+        </p:nvSpPr>
+        <p:spPr>
+          <a:xfrm>
+            <a:off x="6400800" y="3236976"/>
+            <a:ext cx="201168" cy="347472"/>
+          </a:xfrm>
+          <a:prstGeom prst="rect">
+            <a:avLst/>
+          </a:prstGeom>
+          <a:solidFill>
+            <a:srgbClr val="CBD5E1"/>
+          </a:solidFill>
+          <a:ln w="12700">
+            <a:solidFill>
+              <a:srgbClr val="CBD5E1"/>
+            </a:solidFill>
+            <a:prstDash val="solid"/>
+          </a:ln>
+        </p:spPr>
+        <p:txBody>
+          <a:bodyPr/>
+          <a:lstStyle/>
+          <a:p>
+            <a:endParaRPr lang="en-GB"/>
+          </a:p>
+        </p:txBody>
+      </p:sp>
+      <p:sp>
+        <p:nvSpPr>
+          <p:cNvPr id="14" name="Text 11"/>
+          <p:cNvSpPr/>
+          <p:nvPr/>
+        </p:nvSpPr>
+        <p:spPr>
+          <a:xfrm>
+            <a:off x="6675120" y="3236976"/>
+            <a:ext cx="2148840" cy="530352"/>
+          </a:xfrm>
+          <a:prstGeom prst="rect">
+            <a:avLst/>
+          </a:prstGeom>
+          <a:noFill/>
+          <a:ln/>
+        </p:spPr>
+        <p:txBody>
+          <a:bodyPr wrap="square" lIns="0" tIns="0" rIns="0" bIns="0" rtlCol="0" anchor="ctr"/>
+          <a:lstStyle/>
+          <a:p>
+            <a:pPr marL="0" indent="0">
+              <a:buNone/>
+            </a:pPr>
+            <a:r>
+              <a:rPr lang="en-US" sz="1050" dirty="0">
+                <a:solidFill>
+                  <a:srgbClr val="1A1A2E"/>
+                </a:solidFill>
+                <a:latin typeface="Calibri" pitchFamily="34" charset="0"/>
+                <a:ea typeface="Calibri" pitchFamily="34" charset="-122"/>
+                <a:cs typeface="Calibri" pitchFamily="34" charset="-120"/>
+              </a:rPr>
+              <a:t>Transparent bars: not statistically significant (p≥0.05)</a:t>
+            </a:r>
+            <a:endParaRPr lang="en-US" sz="1050" dirty="0"/>
+          </a:p>
+        </p:txBody>
+      </p:sp>
+      <p:sp>
+        <p:nvSpPr>
+          <p:cNvPr id="15" name="Shape 12"/>
+          <p:cNvSpPr/>
+          <p:nvPr/>
+        </p:nvSpPr>
+        <p:spPr>
+          <a:xfrm>
+            <a:off x="6400800" y="3895344"/>
+            <a:ext cx="201168" cy="347472"/>
+          </a:xfrm>
+          <a:prstGeom prst="rect">
+            <a:avLst/>
+          </a:prstGeom>
+          <a:solidFill>
+            <a:srgbClr val="1C4B82"/>
+          </a:solidFill>
+          <a:ln w="12700">
+            <a:solidFill>
+              <a:srgbClr val="1C4B82"/>
+            </a:solidFill>
+            <a:prstDash val="solid"/>
+          </a:ln>
+        </p:spPr>
+        <p:txBody>
+          <a:bodyPr/>
+          <a:lstStyle/>
+          <a:p>
+            <a:endParaRPr lang="en-GB"/>
+          </a:p>
+        </p:txBody>
+      </p:sp>
+      <p:sp>
+        <p:nvSpPr>
+          <p:cNvPr id="16" name="Text 13"/>
+          <p:cNvSpPr/>
+          <p:nvPr/>
+        </p:nvSpPr>
+        <p:spPr>
+          <a:xfrm>
+            <a:off x="6675120" y="3895344"/>
+            <a:ext cx="2148840" cy="530352"/>
+          </a:xfrm>
+          <a:prstGeom prst="rect">
+            <a:avLst/>
+          </a:prstGeom>
+          <a:noFill/>
+          <a:ln/>
+        </p:spPr>
+        <p:txBody>
+          <a:bodyPr wrap="square" lIns="0" tIns="0" rIns="0" bIns="0" rtlCol="0" anchor="ctr"/>
+          <a:lstStyle/>
+          <a:p>
+            <a:pPr marL="0" indent="0">
+              <a:buNone/>
+            </a:pPr>
+            <a:r>
+              <a:rPr lang="en-US" sz="1050" dirty="0">
+                <a:solidFill>
+                  <a:srgbClr val="1A1A2E"/>
+                </a:solidFill>
+                <a:latin typeface="Calibri" pitchFamily="34" charset="0"/>
+                <a:ea typeface="Calibri" pitchFamily="34" charset="-122"/>
+                <a:cs typeface="Calibri" pitchFamily="34" charset="-120"/>
+              </a:rPr>
+              <a:t>Longer bar = stronger effect on churn</a:t>
+            </a:r>
+            <a:endParaRPr lang="en-US" sz="1050" dirty="0"/>
+          </a:p>
+        </p:txBody>
+      </p:sp>
+      <p:sp>
+        <p:nvSpPr>
+          <p:cNvPr id="17" name="Shape 14"/>
+          <p:cNvSpPr/>
+          <p:nvPr/>
+        </p:nvSpPr>
+        <p:spPr>
+          <a:xfrm>
+            <a:off x="6263640" y="4343400"/>
+            <a:ext cx="2651760" cy="640080"/>
+          </a:xfrm>
+          <a:prstGeom prst="rect">
+            <a:avLst/>
+          </a:prstGeom>
+          <a:solidFill>
+            <a:srgbClr val="F0F5FB"/>
+          </a:solidFill>
+          <a:ln w="12700">
+            <a:solidFill>
+              <a:srgbClr val="CBD5E1"/>
+            </a:solidFill>
+            <a:prstDash val="solid"/>
+          </a:ln>
+        </p:spPr>
+        <p:txBody>
+          <a:bodyPr/>
+          <a:lstStyle/>
+          <a:p>
+            <a:endParaRPr lang="en-GB"/>
+          </a:p>
+        </p:txBody>
+      </p:sp>
+      <p:sp>
+        <p:nvSpPr>
+          <p:cNvPr id="18" name="Text 15"/>
+          <p:cNvSpPr/>
+          <p:nvPr/>
+        </p:nvSpPr>
+        <p:spPr>
+          <a:xfrm>
+            <a:off x="6355080" y="4370832"/>
+            <a:ext cx="2468880" cy="548640"/>
+          </a:xfrm>
+          <a:prstGeom prst="rect">
+            <a:avLst/>
+          </a:prstGeom>
+          <a:noFill/>
+          <a:ln/>
+        </p:spPr>
+        <p:txBody>
+          <a:bodyPr wrap="square" lIns="0" tIns="0" rIns="0" bIns="0" rtlCol="0" anchor="ctr"/>
+          <a:lstStyle/>
+          <a:p>
+            <a:pPr marL="0" indent="0">
+              <a:buNone/>
+            </a:pPr>
+            <a:r>
+              <a:rPr lang="en-US" sz="1050" b="1" dirty="0">
+                <a:solidFill>
+                  <a:srgbClr val="1C4B82"/>
+                </a:solidFill>
+                <a:latin typeface="Calibri" pitchFamily="34" charset="0"/>
+                <a:ea typeface="Calibri" pitchFamily="34" charset="-122"/>
+                <a:cs typeface="Calibri" pitchFamily="34" charset="-120"/>
+              </a:rPr>
+              <a:t>7 of 14 predictors are statistically significant. Satisfaction score and contract type are dominant.</a:t>
+            </a:r>
+            <a:r>
+              <a:rPr lang="en-GB" sz="1050" b="1" dirty="0">
+                <a:solidFill>
+                  <a:srgbClr val="1C4B82"/>
+                </a:solidFill>
+                <a:latin typeface="Calibri" pitchFamily="34" charset="0"/>
+                <a:ea typeface="Calibri" pitchFamily="34" charset="-122"/>
+                <a:cs typeface="Calibri" pitchFamily="34" charset="-120"/>
+              </a:rPr>
+              <a:t>(see</a:t>
+            </a:r>
+            <a:r>
+              <a:rPr lang="zh-CN" altLang="en-US" sz="1050" b="1" dirty="0">
+                <a:solidFill>
+                  <a:srgbClr val="1C4B82"/>
+                </a:solidFill>
+                <a:latin typeface="Calibri" pitchFamily="34" charset="0"/>
+                <a:ea typeface="Calibri" pitchFamily="34" charset="-122"/>
+                <a:cs typeface="Calibri" pitchFamily="34" charset="-120"/>
+              </a:rPr>
+              <a:t> </a:t>
+            </a:r>
+            <a:r>
+              <a:rPr lang="en-GB" altLang="zh-CN" sz="1050" b="1" dirty="0">
+                <a:solidFill>
+                  <a:srgbClr val="1C4B82"/>
+                </a:solidFill>
+                <a:latin typeface="Calibri" pitchFamily="34" charset="0"/>
+                <a:ea typeface="Calibri" pitchFamily="34" charset="-122"/>
+                <a:cs typeface="Calibri" pitchFamily="34" charset="-120"/>
+              </a:rPr>
+              <a:t>appendix)</a:t>
+            </a:r>
+            <a:endParaRPr lang="en-US" sz="1050" dirty="0"/>
+          </a:p>
+        </p:txBody>
+      </p:sp>
+    </p:spTree>
+  </p:cSld>
+  <p:clrMapOvr>
+    <a:masterClrMapping/>
+  </p:clrMapOvr>
+</p:sld>
+</file>
+
+<file path=ppt/slides/slide11.xml><?xml version="1.0" encoding="utf-8"?>
+<p:sld xmlns:a="http://schemas.openxmlformats.org/drawingml/2006/main" xmlns:r="http://schemas.openxmlformats.org/officeDocument/2006/relationships" xmlns:p="http://schemas.openxmlformats.org/presentationml/2006/main">
   <p:cSld name="Slide 10">
     <p:bg>
       <p:bgPr>
@@ -2465,7 +3229,7 @@
                 <a:ea typeface="Calibri" pitchFamily="34" charset="-122"/>
                 <a:cs typeface="Calibri" pitchFamily="34" charset="-120"/>
               </a:rPr>
-              <a:t>06</a:t>
+              <a:t>05</a:t>
             </a:r>
             <a:endParaRPr lang="en-US" sz="1800" dirty="0"/>
           </a:p>
@@ -2675,9 +3439,6 @@
           <a:bodyPr wrap="square" lIns="0" tIns="0" rIns="0" bIns="0" rtlCol="0" anchor="ctr"/>
           <a:lstStyle/>
           <a:p>
-            <a:pPr marL="0" indent="0">
-              <a:buNone/>
-            </a:pPr>
             <a:r>
               <a:rPr lang="en-US" sz="1000" dirty="0">
                 <a:solidFill>
@@ -2687,9 +3448,12 @@
                 <a:ea typeface="Calibri" pitchFamily="34" charset="-122"/>
                 <a:cs typeface="Calibri" pitchFamily="34" charset="-120"/>
               </a:rPr>
-              <a:t>Action: Deploy online satisfaction surveys at key milestones; escalate score 1–2 customers</a:t>
-            </a:r>
-            <a:endParaRPr lang="en-US" sz="1000" dirty="0"/>
+              <a:t>Action: </a:t>
+            </a:r>
+            <a:r>
+              <a:rPr lang="en-US" sz="1000" dirty="0"/>
+              <a:t>Launch milestone satisfaction surveys and escalate all low-tier (1–2) responses for urgent follow-up.</a:t>
+            </a:r>
           </a:p>
         </p:txBody>
       </p:sp>
@@ -2929,9 +3693,6 @@
           <a:bodyPr wrap="square" lIns="0" tIns="0" rIns="0" bIns="0" rtlCol="0" anchor="ctr"/>
           <a:lstStyle/>
           <a:p>
-            <a:pPr marL="0" indent="0">
-              <a:buNone/>
-            </a:pPr>
             <a:r>
               <a:rPr lang="en-US" sz="1000" dirty="0">
                 <a:solidFill>
@@ -2941,9 +3702,12 @@
                 <a:ea typeface="Calibri" pitchFamily="34" charset="-122"/>
                 <a:cs typeface="Calibri" pitchFamily="34" charset="-120"/>
               </a:rPr>
-              <a:t>Action: Incentivise monthly→annual migration (discounts, feature unlocks) for moderate-risk cohort</a:t>
-            </a:r>
-            <a:endParaRPr lang="en-US" sz="1000" dirty="0"/>
+              <a:t>Action: </a:t>
+            </a:r>
+            <a:r>
+              <a:rPr lang="en-US" sz="1000" dirty="0"/>
+              <a:t>Drive annual plan adoption within the moderate-risk segment through a mix of financial discounts and value-added feature unlocks.</a:t>
+            </a:r>
           </a:p>
         </p:txBody>
       </p:sp>
@@ -3424,8 +4188,8 @@
         </p:nvSpPr>
         <p:spPr>
           <a:xfrm>
-            <a:off x="868680" y="3749040"/>
-            <a:ext cx="4846320" cy="256032"/>
+            <a:off x="868680" y="3648456"/>
+            <a:ext cx="4846320" cy="442478"/>
           </a:xfrm>
           <a:prstGeom prst="rect">
             <a:avLst/>
@@ -3437,9 +4201,6 @@
           <a:bodyPr wrap="square" lIns="0" tIns="0" rIns="0" bIns="0" rtlCol="0" anchor="ctr"/>
           <a:lstStyle/>
           <a:p>
-            <a:pPr marL="0" indent="0">
-              <a:buNone/>
-            </a:pPr>
             <a:r>
               <a:rPr lang="en-US" sz="1000" dirty="0">
                 <a:solidFill>
@@ -3449,9 +4210,12 @@
                 <a:ea typeface="Calibri" pitchFamily="34" charset="-122"/>
                 <a:cs typeface="Calibri" pitchFamily="34" charset="-120"/>
               </a:rPr>
-              <a:t>Action: Tiered triggers at day 14/30/60 of inactivity: notifications, CSM call, offer</a:t>
-            </a:r>
-            <a:endParaRPr lang="en-US" sz="1000" dirty="0"/>
+              <a:t>Action: </a:t>
+            </a:r>
+            <a:r>
+              <a:rPr lang="en-US" sz="1000" dirty="0"/>
+              <a:t>Our re-engagement strategy involves tiered interventions: notifications at day 14, CSM calls at day 30, and specialized offers at day 60.</a:t>
+            </a:r>
           </a:p>
         </p:txBody>
       </p:sp>
@@ -3703,7 +4467,51 @@
                 <a:ea typeface="Calibri" pitchFamily="34" charset="-122"/>
                 <a:cs typeface="Calibri" pitchFamily="34" charset="-120"/>
               </a:rPr>
-              <a:t>Action: welcome call, 30/60/90-day check-ins, satisfaction survey</a:t>
+              <a:t>Action: welcome call </a:t>
+            </a:r>
+            <a:r>
+              <a:rPr lang="en-GB" sz="1000" dirty="0">
+                <a:solidFill>
+                  <a:srgbClr val="1A1A2E"/>
+                </a:solidFill>
+                <a:latin typeface="Calibri" pitchFamily="34" charset="0"/>
+                <a:ea typeface="Calibri" pitchFamily="34" charset="-122"/>
+                <a:cs typeface="Calibri" pitchFamily="34" charset="-120"/>
+              </a:rPr>
+              <a:t>to</a:t>
+            </a:r>
+            <a:r>
+              <a:rPr lang="zh-CN" altLang="en-US" sz="1000" dirty="0">
+                <a:solidFill>
+                  <a:srgbClr val="1A1A2E"/>
+                </a:solidFill>
+                <a:latin typeface="Calibri" pitchFamily="34" charset="0"/>
+                <a:ea typeface="Calibri" pitchFamily="34" charset="-122"/>
+                <a:cs typeface="Calibri" pitchFamily="34" charset="-120"/>
+              </a:rPr>
+              <a:t> </a:t>
+            </a:r>
+            <a:r>
+              <a:rPr lang="en-GB" altLang="zh-CN" sz="1000" dirty="0">
+                <a:solidFill>
+                  <a:srgbClr val="1A1A2E"/>
+                </a:solidFill>
+                <a:latin typeface="Calibri" pitchFamily="34" charset="0"/>
+                <a:ea typeface="Calibri" pitchFamily="34" charset="-122"/>
+                <a:cs typeface="Calibri" pitchFamily="34" charset="-120"/>
+              </a:rPr>
+              <a:t>engage customers</a:t>
+            </a:r>
+            <a:r>
+              <a:rPr lang="en-US" sz="1000" dirty="0">
+                <a:solidFill>
+                  <a:srgbClr val="1A1A2E"/>
+                </a:solidFill>
+                <a:latin typeface="Calibri" pitchFamily="34" charset="0"/>
+                <a:ea typeface="Calibri" pitchFamily="34" charset="-122"/>
+                <a:cs typeface="Calibri" pitchFamily="34" charset="-120"/>
+              </a:rPr>
+              <a:t>, 30/60/90-day check-ins, satisfaction survey</a:t>
             </a:r>
             <a:endParaRPr lang="en-US" sz="1000" dirty="0"/>
           </a:p>
@@ -3824,7 +4632,7 @@
 </p:sld>
 </file>
 
-<file path=ppt/slides/slide11.xml><?xml version="1.0" encoding="utf-8"?>
+<file path=ppt/slides/slide12.xml><?xml version="1.0" encoding="utf-8"?>
 <p:sld xmlns:a="http://schemas.openxmlformats.org/drawingml/2006/main" xmlns:r="http://schemas.openxmlformats.org/officeDocument/2006/relationships" xmlns:p="http://schemas.openxmlformats.org/presentationml/2006/main">
   <p:cSld name="Slide 11">
     <p:bg>
@@ -4190,7 +4998,7 @@
                 <a:ea typeface="Calibri" pitchFamily="34" charset="-122"/>
                 <a:cs typeface="Calibri" pitchFamily="34" charset="-120"/>
               </a:rPr>
-              <a:t>Annual contracts reduce churn 76% — a structural fix management can implement now</a:t>
+              <a:t>Annual contracts reduce churn 76% — a structural fix management can implement to mitigate churn</a:t>
             </a:r>
             <a:endParaRPr lang="en-US" sz="1300" dirty="0"/>
           </a:p>
@@ -4300,7 +5108,7 @@
                 <a:ea typeface="Calibri" pitchFamily="34" charset="-122"/>
                 <a:cs typeface="Calibri" pitchFamily="34" charset="-120"/>
               </a:rPr>
-              <a:t>Support tickets signal frustration — 3+ tickets = crisis-level intervention needed</a:t>
+              <a:t>Support tickets number signal frustration — 3+ tickets implies crisis-level intervention needed</a:t>
             </a:r>
             <a:endParaRPr lang="en-US" sz="1300" dirty="0"/>
           </a:p>
@@ -4410,7 +5218,7 @@
                 <a:ea typeface="Calibri" pitchFamily="34" charset="-122"/>
                 <a:cs typeface="Calibri" pitchFamily="34" charset="-120"/>
               </a:rPr>
-              <a:t>Login inactivity is a detectable, real-time churn signal requiring automated triggers</a:t>
+              <a:t>Login recency is a detectable, real-time churn signal requiring automated triggers</a:t>
             </a:r>
             <a:endParaRPr lang="en-US" sz="1300" dirty="0"/>
           </a:p>
@@ -4520,7 +5328,95 @@
                 <a:ea typeface="Calibri" pitchFamily="34" charset="-122"/>
                 <a:cs typeface="Calibri" pitchFamily="34" charset="-120"/>
               </a:rPr>
-              <a:t>New subscribers are highest-risk — 90-day onboarding is the most impactful early investment</a:t>
+              <a:t>New subscribers are highest-risk — </a:t>
+            </a:r>
+            <a:r>
+              <a:rPr lang="en-US" altLang="zh-CN" sz="1300" dirty="0">
+                <a:solidFill>
+                  <a:srgbClr val="FFFFFF"/>
+                </a:solidFill>
+                <a:latin typeface="Calibri" pitchFamily="34" charset="0"/>
+                <a:ea typeface="Calibri" pitchFamily="34" charset="-122"/>
+                <a:cs typeface="Calibri" pitchFamily="34" charset="-120"/>
+              </a:rPr>
+              <a:t>The first </a:t>
+            </a:r>
+            <a:r>
+              <a:rPr lang="en-US" sz="1300" dirty="0">
+                <a:solidFill>
+                  <a:srgbClr val="FFFFFF"/>
+                </a:solidFill>
+                <a:latin typeface="Calibri" pitchFamily="34" charset="0"/>
+                <a:ea typeface="Calibri" pitchFamily="34" charset="-122"/>
+                <a:cs typeface="Calibri" pitchFamily="34" charset="-120"/>
+              </a:rPr>
+              <a:t>90-day </a:t>
+            </a:r>
+            <a:r>
+              <a:rPr lang="en-US" altLang="zh-CN" sz="1300" dirty="0">
+                <a:solidFill>
+                  <a:srgbClr val="FFFFFF"/>
+                </a:solidFill>
+                <a:latin typeface="Calibri" pitchFamily="34" charset="0"/>
+                <a:ea typeface="Calibri" pitchFamily="34" charset="-122"/>
+                <a:cs typeface="Calibri" pitchFamily="34" charset="-120"/>
+              </a:rPr>
+              <a:t>of</a:t>
+            </a:r>
+            <a:r>
+              <a:rPr lang="en-US" sz="1300" dirty="0">
+                <a:solidFill>
+                  <a:srgbClr val="FFFFFF"/>
+                </a:solidFill>
+                <a:latin typeface="Calibri" pitchFamily="34" charset="0"/>
+                <a:ea typeface="Calibri" pitchFamily="34" charset="-122"/>
+                <a:cs typeface="Calibri" pitchFamily="34" charset="-120"/>
+              </a:rPr>
+              <a:t> onboarding is the most </a:t>
+            </a:r>
+            <a:r>
+              <a:rPr lang="en-US" altLang="zh-CN" sz="1300" dirty="0">
+                <a:solidFill>
+                  <a:srgbClr val="FFFFFF"/>
+                </a:solidFill>
+                <a:latin typeface="Calibri" pitchFamily="34" charset="0"/>
+                <a:ea typeface="Calibri" pitchFamily="34" charset="-122"/>
+                <a:cs typeface="Calibri" pitchFamily="34" charset="-120"/>
+              </a:rPr>
+              <a:t>critical</a:t>
+            </a:r>
+            <a:r>
+              <a:rPr lang="en-US" sz="1300" dirty="0">
+                <a:solidFill>
+                  <a:srgbClr val="FFFFFF"/>
+                </a:solidFill>
+                <a:latin typeface="Calibri" pitchFamily="34" charset="0"/>
+                <a:ea typeface="Calibri" pitchFamily="34" charset="-122"/>
+                <a:cs typeface="Calibri" pitchFamily="34" charset="-120"/>
+              </a:rPr>
+              <a:t> periods for customers </a:t>
+            </a:r>
+            <a:r>
+              <a:rPr lang="en-US" altLang="zh-CN" sz="1300" dirty="0">
+                <a:solidFill>
+                  <a:srgbClr val="FFFFFF"/>
+                </a:solidFill>
+                <a:latin typeface="Calibri" pitchFamily="34" charset="0"/>
+                <a:ea typeface="Calibri" pitchFamily="34" charset="-122"/>
+                <a:cs typeface="Calibri" pitchFamily="34" charset="-120"/>
+              </a:rPr>
+              <a:t>retention</a:t>
+            </a:r>
+            <a:r>
+              <a:rPr lang="zh-CN" altLang="en-US" sz="1300" dirty="0">
+                <a:solidFill>
+                  <a:srgbClr val="FFFFFF"/>
+                </a:solidFill>
+                <a:latin typeface="Calibri" pitchFamily="34" charset="0"/>
+                <a:ea typeface="Calibri" pitchFamily="34" charset="-122"/>
+                <a:cs typeface="Calibri" pitchFamily="34" charset="-120"/>
+              </a:rPr>
+              <a:t>。</a:t>
             </a:r>
             <a:endParaRPr lang="en-US" sz="1300" dirty="0"/>
           </a:p>
@@ -4607,7 +5503,7 @@
 </p:sld>
 </file>
 
-<file path=ppt/slides/slide12.xml><?xml version="1.0" encoding="utf-8"?>
+<file path=ppt/slides/slide13.xml><?xml version="1.0" encoding="utf-8"?>
 <p:sld xmlns:a="http://schemas.openxmlformats.org/drawingml/2006/main" xmlns:r="http://schemas.openxmlformats.org/officeDocument/2006/relationships" xmlns:p="http://schemas.openxmlformats.org/presentationml/2006/main">
   <p:cSld>
     <p:spTree>
@@ -4740,7 +5636,7 @@
 </p:sld>
 </file>
 
-<file path=ppt/slides/slide13.xml><?xml version="1.0" encoding="utf-8"?>
+<file path=ppt/slides/slide14.xml><?xml version="1.0" encoding="utf-8"?>
 <p:sld xmlns:a="http://schemas.openxmlformats.org/drawingml/2006/main" xmlns:r="http://schemas.openxmlformats.org/officeDocument/2006/relationships" xmlns:p="http://schemas.openxmlformats.org/presentationml/2006/main">
   <p:cSld name="Slide 12">
     <p:bg>
@@ -12200,7 +13096,7 @@
 </p:sld>
 </file>
 
-<file path=ppt/slides/slide14.xml><?xml version="1.0" encoding="utf-8"?>
+<file path=ppt/slides/slide15.xml><?xml version="1.0" encoding="utf-8"?>
 <p:sld xmlns:a="http://schemas.openxmlformats.org/drawingml/2006/main" xmlns:r="http://schemas.openxmlformats.org/officeDocument/2006/relationships" xmlns:p="http://schemas.openxmlformats.org/presentationml/2006/main">
   <p:cSld>
     <p:spTree>
@@ -12331,7 +13227,7 @@
 </p:sld>
 </file>
 
-<file path=ppt/slides/slide15.xml><?xml version="1.0" encoding="utf-8"?>
+<file path=ppt/slides/slide16.xml><?xml version="1.0" encoding="utf-8"?>
 <p:sld xmlns:a="http://schemas.openxmlformats.org/drawingml/2006/main" xmlns:r="http://schemas.openxmlformats.org/officeDocument/2006/relationships" xmlns:p="http://schemas.openxmlformats.org/presentationml/2006/main">
   <p:cSld>
     <p:spTree>
@@ -13373,7 +14269,7 @@
           <a:bodyPr/>
           <a:lstStyle/>
           <a:p>
-            <a:endParaRPr lang="en-GB"/>
+            <a:endParaRPr lang="en-GB" dirty="0"/>
           </a:p>
         </p:txBody>
       </p:sp>
@@ -13476,7 +14372,18 @@
                 <a:ea typeface="Calibri" pitchFamily="34" charset="-122"/>
                 <a:cs typeface="Calibri" pitchFamily="34" charset="-120"/>
               </a:rPr>
-              <a:t>Key Findings</a:t>
+              <a:t>Key Findings </a:t>
+            </a:r>
+            <a:r>
+              <a:rPr lang="en-US" altLang="zh-CN" sz="1300" b="1" dirty="0">
+                <a:solidFill>
+                  <a:srgbClr val="1C4B82"/>
+                </a:solidFill>
+                <a:latin typeface="Calibri" pitchFamily="34" charset="0"/>
+                <a:ea typeface="Calibri" pitchFamily="34" charset="-122"/>
+                <a:cs typeface="Calibri" pitchFamily="34" charset="-120"/>
+              </a:rPr>
+              <a:t>and Insights</a:t>
             </a:r>
             <a:endParaRPr lang="en-US" sz="1300" dirty="0"/>
           </a:p>
@@ -13659,7 +14566,7 @@
                 <a:ea typeface="Calibri" pitchFamily="34" charset="-122"/>
                 <a:cs typeface="Calibri" pitchFamily="34" charset="-120"/>
               </a:rPr>
-              <a:t>Business Insights</a:t>
+              <a:t>Recommendations</a:t>
             </a:r>
             <a:endParaRPr lang="en-US" sz="1300" dirty="0"/>
           </a:p>
@@ -13686,192 +14593,6 @@
           <a:bodyPr wrap="square" lIns="0" tIns="0" rIns="0" bIns="0" rtlCol="0" anchor="ctr"/>
           <a:lstStyle/>
           <a:p>
-            <a:pPr marL="0" indent="0">
-              <a:buNone/>
-            </a:pPr>
-            <a:r>
-              <a:rPr lang="en-US" sz="1050" dirty="0">
-                <a:solidFill>
-                  <a:srgbClr val="64748B"/>
-                </a:solidFill>
-                <a:latin typeface="Calibri" pitchFamily="34" charset="0"/>
-                <a:ea typeface="Calibri" pitchFamily="34" charset="-122"/>
-                <a:cs typeface="Calibri" pitchFamily="34" charset="-120"/>
-              </a:rPr>
-              <a:t>What the numbers mean for day-to-day operations</a:t>
-            </a:r>
-            <a:endParaRPr lang="en-US" sz="1050" dirty="0"/>
-          </a:p>
-        </p:txBody>
-      </p:sp>
-      <p:sp>
-        <p:nvSpPr>
-          <p:cNvPr id="29" name="Shape 27"/>
-          <p:cNvSpPr/>
-          <p:nvPr/>
-        </p:nvSpPr>
-        <p:spPr>
-          <a:xfrm>
-            <a:off x="5029200" y="3611880"/>
-            <a:ext cx="4114800" cy="1051560"/>
-          </a:xfrm>
-          <a:prstGeom prst="rect">
-            <a:avLst/>
-          </a:prstGeom>
-          <a:solidFill>
-            <a:srgbClr val="FFFFFF"/>
-          </a:solidFill>
-          <a:ln w="12700">
-            <a:solidFill>
-              <a:srgbClr val="CBD5E1"/>
-            </a:solidFill>
-            <a:prstDash val="solid"/>
-          </a:ln>
-          <a:effectLst>
-            <a:outerShdw blurRad="101600" dist="38100" dir="8100000" algn="bl" rotWithShape="0">
-              <a:srgbClr val="000000">
-                <a:alpha val="12000"/>
-              </a:srgbClr>
-            </a:outerShdw>
-          </a:effectLst>
-        </p:spPr>
-        <p:txBody>
-          <a:bodyPr/>
-          <a:lstStyle/>
-          <a:p>
-            <a:endParaRPr lang="en-GB"/>
-          </a:p>
-        </p:txBody>
-      </p:sp>
-      <p:sp>
-        <p:nvSpPr>
-          <p:cNvPr id="30" name="Shape 28"/>
-          <p:cNvSpPr/>
-          <p:nvPr/>
-        </p:nvSpPr>
-        <p:spPr>
-          <a:xfrm>
-            <a:off x="5029200" y="3611880"/>
-            <a:ext cx="502920" cy="1051560"/>
-          </a:xfrm>
-          <a:prstGeom prst="rect">
-            <a:avLst/>
-          </a:prstGeom>
-          <a:solidFill>
-            <a:srgbClr val="1C4B82"/>
-          </a:solidFill>
-          <a:ln/>
-        </p:spPr>
-        <p:txBody>
-          <a:bodyPr/>
-          <a:lstStyle/>
-          <a:p>
-            <a:endParaRPr lang="en-GB"/>
-          </a:p>
-        </p:txBody>
-      </p:sp>
-      <p:sp>
-        <p:nvSpPr>
-          <p:cNvPr id="31" name="Text 29"/>
-          <p:cNvSpPr/>
-          <p:nvPr/>
-        </p:nvSpPr>
-        <p:spPr>
-          <a:xfrm>
-            <a:off x="5029200" y="3611880"/>
-            <a:ext cx="502920" cy="1051560"/>
-          </a:xfrm>
-          <a:prstGeom prst="rect">
-            <a:avLst/>
-          </a:prstGeom>
-          <a:noFill/>
-          <a:ln/>
-        </p:spPr>
-        <p:txBody>
-          <a:bodyPr wrap="square" lIns="0" tIns="0" rIns="0" bIns="0" rtlCol="0" anchor="ctr"/>
-          <a:lstStyle/>
-          <a:p>
-            <a:pPr marL="0" indent="0" algn="ctr">
-              <a:buNone/>
-            </a:pPr>
-            <a:r>
-              <a:rPr lang="en-US" sz="1500" b="1" dirty="0">
-                <a:solidFill>
-                  <a:srgbClr val="FFFFFF"/>
-                </a:solidFill>
-                <a:latin typeface="Calibri" pitchFamily="34" charset="0"/>
-                <a:ea typeface="Calibri" pitchFamily="34" charset="-122"/>
-                <a:cs typeface="Calibri" pitchFamily="34" charset="-120"/>
-              </a:rPr>
-              <a:t>06</a:t>
-            </a:r>
-            <a:endParaRPr lang="en-US" sz="1500" dirty="0"/>
-          </a:p>
-        </p:txBody>
-      </p:sp>
-      <p:sp>
-        <p:nvSpPr>
-          <p:cNvPr id="32" name="Text 30"/>
-          <p:cNvSpPr/>
-          <p:nvPr/>
-        </p:nvSpPr>
-        <p:spPr>
-          <a:xfrm>
-            <a:off x="5623560" y="3703320"/>
-            <a:ext cx="3429000" cy="365760"/>
-          </a:xfrm>
-          <a:prstGeom prst="rect">
-            <a:avLst/>
-          </a:prstGeom>
-          <a:noFill/>
-          <a:ln/>
-        </p:spPr>
-        <p:txBody>
-          <a:bodyPr wrap="square" lIns="0" tIns="0" rIns="0" bIns="0" rtlCol="0" anchor="ctr"/>
-          <a:lstStyle/>
-          <a:p>
-            <a:pPr marL="0" indent="0">
-              <a:buNone/>
-            </a:pPr>
-            <a:r>
-              <a:rPr lang="en-US" sz="1300" b="1" dirty="0">
-                <a:solidFill>
-                  <a:srgbClr val="1C4B82"/>
-                </a:solidFill>
-                <a:latin typeface="Calibri" pitchFamily="34" charset="0"/>
-                <a:ea typeface="Calibri" pitchFamily="34" charset="-122"/>
-                <a:cs typeface="Calibri" pitchFamily="34" charset="-120"/>
-              </a:rPr>
-              <a:t>Recommendations</a:t>
-            </a:r>
-            <a:endParaRPr lang="en-US" sz="1300" dirty="0"/>
-          </a:p>
-        </p:txBody>
-      </p:sp>
-      <p:sp>
-        <p:nvSpPr>
-          <p:cNvPr id="33" name="Text 31"/>
-          <p:cNvSpPr/>
-          <p:nvPr/>
-        </p:nvSpPr>
-        <p:spPr>
-          <a:xfrm>
-            <a:off x="5623560" y="4069080"/>
-            <a:ext cx="3429000" cy="502920"/>
-          </a:xfrm>
-          <a:prstGeom prst="rect">
-            <a:avLst/>
-          </a:prstGeom>
-          <a:noFill/>
-          <a:ln/>
-        </p:spPr>
-        <p:txBody>
-          <a:bodyPr wrap="square" lIns="0" tIns="0" rIns="0" bIns="0" rtlCol="0" anchor="ctr"/>
-          <a:lstStyle/>
-          <a:p>
-            <a:pPr marL="0" indent="0">
-              <a:buNone/>
-            </a:pPr>
             <a:r>
               <a:rPr lang="en-US" sz="1050" dirty="0">
                 <a:solidFill>
@@ -14935,6 +15656,730 @@
 
 <file path=ppt/slides/slide4.xml><?xml version="1.0" encoding="utf-8"?>
 <p:sld xmlns:a="http://schemas.openxmlformats.org/drawingml/2006/main" xmlns:r="http://schemas.openxmlformats.org/officeDocument/2006/relationships" xmlns:p="http://schemas.openxmlformats.org/presentationml/2006/main">
+  <p:cSld>
+    <p:bg>
+      <p:bgPr>
+        <a:solidFill>
+          <a:srgbClr val="FAFBFD"/>
+        </a:solidFill>
+        <a:effectLst/>
+      </p:bgPr>
+    </p:bg>
+    <p:spTree>
+      <p:nvGrpSpPr>
+        <p:cNvPr id="1" name="">
+          <a:extLst>
+            <a:ext uri="{FF2B5EF4-FFF2-40B4-BE49-F238E27FC236}">
+              <a16:creationId xmlns:a16="http://schemas.microsoft.com/office/drawing/2014/main" id="{D37ABD8D-FC61-19DF-DB9C-16B534665FAA}"/>
+            </a:ext>
+          </a:extLst>
+        </p:cNvPr>
+        <p:cNvGrpSpPr/>
+        <p:nvPr/>
+      </p:nvGrpSpPr>
+      <p:grpSpPr>
+        <a:xfrm>
+          <a:off x="0" y="0"/>
+          <a:ext cx="0" cy="0"/>
+          <a:chOff x="0" y="0"/>
+          <a:chExt cx="0" cy="0"/>
+        </a:xfrm>
+      </p:grpSpPr>
+      <p:sp>
+        <p:nvSpPr>
+          <p:cNvPr id="2" name="Shape 0">
+            <a:extLst>
+              <a:ext uri="{FF2B5EF4-FFF2-40B4-BE49-F238E27FC236}">
+                <a16:creationId xmlns:a16="http://schemas.microsoft.com/office/drawing/2014/main" id="{58EE4617-50E8-A5FD-33FD-66CFC231D4E0}"/>
+              </a:ext>
+            </a:extLst>
+          </p:cNvPr>
+          <p:cNvSpPr/>
+          <p:nvPr/>
+        </p:nvSpPr>
+        <p:spPr>
+          <a:xfrm>
+            <a:off x="0" y="0"/>
+            <a:ext cx="9144000" cy="1005840"/>
+          </a:xfrm>
+          <a:prstGeom prst="rect">
+            <a:avLst/>
+          </a:prstGeom>
+          <a:solidFill>
+            <a:srgbClr val="1C4B82"/>
+          </a:solidFill>
+          <a:ln/>
+        </p:spPr>
+        <p:txBody>
+          <a:bodyPr/>
+          <a:lstStyle/>
+          <a:p>
+            <a:endParaRPr lang="en-GB"/>
+          </a:p>
+        </p:txBody>
+      </p:sp>
+      <p:sp>
+        <p:nvSpPr>
+          <p:cNvPr id="3" name="Text 1">
+            <a:extLst>
+              <a:ext uri="{FF2B5EF4-FFF2-40B4-BE49-F238E27FC236}">
+                <a16:creationId xmlns:a16="http://schemas.microsoft.com/office/drawing/2014/main" id="{B082C21D-B8E1-818D-F34F-903F4660A3B0}"/>
+              </a:ext>
+            </a:extLst>
+          </p:cNvPr>
+          <p:cNvSpPr/>
+          <p:nvPr/>
+        </p:nvSpPr>
+        <p:spPr>
+          <a:xfrm>
+            <a:off x="228600" y="137160"/>
+            <a:ext cx="640080" cy="777240"/>
+          </a:xfrm>
+          <a:prstGeom prst="rect">
+            <a:avLst/>
+          </a:prstGeom>
+          <a:noFill/>
+          <a:ln/>
+        </p:spPr>
+        <p:txBody>
+          <a:bodyPr wrap="square" lIns="0" tIns="0" rIns="0" bIns="0" rtlCol="0" anchor="ctr"/>
+          <a:lstStyle/>
+          <a:p>
+            <a:pPr marL="0" indent="0">
+              <a:buNone/>
+            </a:pPr>
+            <a:r>
+              <a:rPr lang="en-US" sz="1800" b="1" dirty="0">
+                <a:solidFill>
+                  <a:srgbClr val="E84A5F"/>
+                </a:solidFill>
+                <a:latin typeface="Calibri" pitchFamily="34" charset="0"/>
+                <a:ea typeface="Calibri" pitchFamily="34" charset="-122"/>
+                <a:cs typeface="Calibri" pitchFamily="34" charset="-120"/>
+              </a:rPr>
+              <a:t>0</a:t>
+            </a:r>
+            <a:r>
+              <a:rPr lang="en-US" b="1" dirty="0">
+                <a:solidFill>
+                  <a:srgbClr val="E84A5F"/>
+                </a:solidFill>
+                <a:latin typeface="Calibri" pitchFamily="34" charset="0"/>
+                <a:ea typeface="Calibri" pitchFamily="34" charset="-122"/>
+                <a:cs typeface="Calibri" pitchFamily="34" charset="-120"/>
+              </a:rPr>
+              <a:t>2</a:t>
+            </a:r>
+            <a:endParaRPr lang="en-US" sz="1800" dirty="0"/>
+          </a:p>
+        </p:txBody>
+      </p:sp>
+      <p:sp>
+        <p:nvSpPr>
+          <p:cNvPr id="4" name="Text 2">
+            <a:extLst>
+              <a:ext uri="{FF2B5EF4-FFF2-40B4-BE49-F238E27FC236}">
+                <a16:creationId xmlns:a16="http://schemas.microsoft.com/office/drawing/2014/main" id="{B6185152-3346-C59A-5266-D2C96DF4D535}"/>
+              </a:ext>
+            </a:extLst>
+          </p:cNvPr>
+          <p:cNvSpPr/>
+          <p:nvPr/>
+        </p:nvSpPr>
+        <p:spPr>
+          <a:xfrm>
+            <a:off x="822960" y="137160"/>
+            <a:ext cx="7772400" cy="777240"/>
+          </a:xfrm>
+          <a:prstGeom prst="rect">
+            <a:avLst/>
+          </a:prstGeom>
+          <a:noFill/>
+          <a:ln/>
+        </p:spPr>
+        <p:txBody>
+          <a:bodyPr wrap="square" lIns="0" tIns="0" rIns="0" bIns="0" rtlCol="0" anchor="ctr"/>
+          <a:lstStyle/>
+          <a:p>
+            <a:pPr marL="0" indent="0">
+              <a:buNone/>
+            </a:pPr>
+            <a:r>
+              <a:rPr lang="en-US" sz="3000" b="1" dirty="0">
+                <a:solidFill>
+                  <a:srgbClr val="FFFFFF"/>
+                </a:solidFill>
+                <a:latin typeface="Calibri" pitchFamily="34" charset="0"/>
+                <a:ea typeface="Calibri" pitchFamily="34" charset="-122"/>
+                <a:cs typeface="Calibri" pitchFamily="34" charset="-120"/>
+              </a:rPr>
+              <a:t>Research </a:t>
+            </a:r>
+            <a:r>
+              <a:rPr lang="en-US" altLang="zh-CN" sz="3000" b="1" dirty="0">
+                <a:solidFill>
+                  <a:srgbClr val="FFFFFF"/>
+                </a:solidFill>
+                <a:latin typeface="Calibri" pitchFamily="34" charset="0"/>
+                <a:ea typeface="Calibri" pitchFamily="34" charset="-122"/>
+                <a:cs typeface="Calibri" pitchFamily="34" charset="-120"/>
+              </a:rPr>
+              <a:t>Questions</a:t>
+            </a:r>
+          </a:p>
+        </p:txBody>
+      </p:sp>
+      <p:sp>
+        <p:nvSpPr>
+          <p:cNvPr id="5" name="Text 3">
+            <a:extLst>
+              <a:ext uri="{FF2B5EF4-FFF2-40B4-BE49-F238E27FC236}">
+                <a16:creationId xmlns:a16="http://schemas.microsoft.com/office/drawing/2014/main" id="{3FDC1D9A-56AF-2986-F9CA-8FE86053D998}"/>
+              </a:ext>
+            </a:extLst>
+          </p:cNvPr>
+          <p:cNvSpPr/>
+          <p:nvPr/>
+        </p:nvSpPr>
+        <p:spPr>
+          <a:xfrm>
+            <a:off x="457200" y="1143000"/>
+            <a:ext cx="5029200" cy="365760"/>
+          </a:xfrm>
+          <a:prstGeom prst="rect">
+            <a:avLst/>
+          </a:prstGeom>
+          <a:noFill/>
+          <a:ln/>
+        </p:spPr>
+        <p:txBody>
+          <a:bodyPr wrap="square" lIns="0" tIns="0" rIns="0" bIns="0" rtlCol="0" anchor="ctr"/>
+          <a:lstStyle/>
+          <a:p>
+            <a:pPr marL="0" indent="0">
+              <a:buNone/>
+            </a:pPr>
+            <a:r>
+              <a:rPr lang="en-US" sz="1300" b="1" dirty="0">
+                <a:solidFill>
+                  <a:srgbClr val="1C4B82"/>
+                </a:solidFill>
+                <a:latin typeface="Calibri" pitchFamily="34" charset="0"/>
+                <a:ea typeface="Calibri" pitchFamily="34" charset="-122"/>
+                <a:cs typeface="Calibri" pitchFamily="34" charset="-120"/>
+              </a:rPr>
+              <a:t>Question</a:t>
+            </a:r>
+            <a:r>
+              <a:rPr lang="en-US" altLang="zh-CN" sz="1300" b="1" dirty="0">
+                <a:solidFill>
+                  <a:srgbClr val="1C4B82"/>
+                </a:solidFill>
+                <a:latin typeface="Calibri" pitchFamily="34" charset="0"/>
+                <a:ea typeface="Calibri" pitchFamily="34" charset="-122"/>
+                <a:cs typeface="Calibri" pitchFamily="34" charset="-120"/>
+              </a:rPr>
+              <a:t>s</a:t>
+            </a:r>
+            <a:endParaRPr lang="en-US" sz="1300" dirty="0"/>
+          </a:p>
+        </p:txBody>
+      </p:sp>
+      <p:sp>
+        <p:nvSpPr>
+          <p:cNvPr id="6" name="Text 4">
+            <a:extLst>
+              <a:ext uri="{FF2B5EF4-FFF2-40B4-BE49-F238E27FC236}">
+                <a16:creationId xmlns:a16="http://schemas.microsoft.com/office/drawing/2014/main" id="{E896E321-8880-4D00-01D8-239F72A23F17}"/>
+              </a:ext>
+            </a:extLst>
+          </p:cNvPr>
+          <p:cNvSpPr/>
+          <p:nvPr/>
+        </p:nvSpPr>
+        <p:spPr>
+          <a:xfrm>
+            <a:off x="543261" y="1403604"/>
+            <a:ext cx="4846320" cy="347472"/>
+          </a:xfrm>
+          <a:prstGeom prst="rect">
+            <a:avLst/>
+          </a:prstGeom>
+          <a:noFill/>
+          <a:ln/>
+        </p:spPr>
+        <p:txBody>
+          <a:bodyPr wrap="square" lIns="0" tIns="0" rIns="0" bIns="0" rtlCol="0" anchor="t"/>
+          <a:lstStyle/>
+          <a:p>
+            <a:pPr marL="0" indent="0">
+              <a:buNone/>
+            </a:pPr>
+            <a:endParaRPr lang="en-US" sz="1150" dirty="0"/>
+          </a:p>
+        </p:txBody>
+      </p:sp>
+      <p:sp>
+        <p:nvSpPr>
+          <p:cNvPr id="7" name="Text 5">
+            <a:extLst>
+              <a:ext uri="{FF2B5EF4-FFF2-40B4-BE49-F238E27FC236}">
+                <a16:creationId xmlns:a16="http://schemas.microsoft.com/office/drawing/2014/main" id="{A7CD5DA9-96B1-5627-B68D-EBC00FC4046E}"/>
+              </a:ext>
+            </a:extLst>
+          </p:cNvPr>
+          <p:cNvSpPr/>
+          <p:nvPr/>
+        </p:nvSpPr>
+        <p:spPr>
+          <a:xfrm>
+            <a:off x="524436" y="1551050"/>
+            <a:ext cx="7832912" cy="237744"/>
+          </a:xfrm>
+          <a:prstGeom prst="rect">
+            <a:avLst/>
+          </a:prstGeom>
+          <a:noFill/>
+          <a:ln/>
+        </p:spPr>
+        <p:txBody>
+          <a:bodyPr wrap="square" lIns="0" tIns="0" rIns="0" bIns="0" rtlCol="0" anchor="t"/>
+          <a:lstStyle/>
+          <a:p>
+            <a:r>
+              <a:rPr lang="en-US" sz="1200" b="1" dirty="0">
+                <a:solidFill>
+                  <a:srgbClr val="E84A5F"/>
+                </a:solidFill>
+                <a:latin typeface="Calibri" pitchFamily="34" charset="0"/>
+                <a:ea typeface="Calibri" pitchFamily="34" charset="-122"/>
+                <a:cs typeface="Calibri" pitchFamily="34" charset="-120"/>
+              </a:rPr>
+              <a:t>• </a:t>
+            </a:r>
+            <a:r>
+              <a:rPr lang="en-US" sz="1200" dirty="0"/>
+              <a:t>What are the primary statistically significant predictors of customer churn in a subscription-based digital services business, and what is the magnitude and direction of their effect on churn probability?</a:t>
+            </a:r>
+          </a:p>
+          <a:p>
+            <a:br>
+              <a:rPr lang="en-US" sz="1200" dirty="0"/>
+            </a:br>
+            <a:endParaRPr lang="en-US" sz="1150" dirty="0"/>
+          </a:p>
+        </p:txBody>
+      </p:sp>
+      <p:sp>
+        <p:nvSpPr>
+          <p:cNvPr id="8" name="Text 6">
+            <a:extLst>
+              <a:ext uri="{FF2B5EF4-FFF2-40B4-BE49-F238E27FC236}">
+                <a16:creationId xmlns:a16="http://schemas.microsoft.com/office/drawing/2014/main" id="{63D4B9A5-0452-45CD-B5C0-F8AADBE6CB1D}"/>
+              </a:ext>
+            </a:extLst>
+          </p:cNvPr>
+          <p:cNvSpPr/>
+          <p:nvPr/>
+        </p:nvSpPr>
+        <p:spPr>
+          <a:xfrm>
+            <a:off x="537882" y="1970532"/>
+            <a:ext cx="7671548" cy="347472"/>
+          </a:xfrm>
+          <a:prstGeom prst="rect">
+            <a:avLst/>
+          </a:prstGeom>
+          <a:noFill/>
+          <a:ln/>
+        </p:spPr>
+        <p:txBody>
+          <a:bodyPr wrap="square" lIns="0" tIns="0" rIns="0" bIns="0" rtlCol="0" anchor="t"/>
+          <a:lstStyle/>
+          <a:p>
+            <a:r>
+              <a:rPr lang="en-US" sz="1200" b="1" dirty="0">
+                <a:solidFill>
+                  <a:srgbClr val="E84A5F"/>
+                </a:solidFill>
+                <a:latin typeface="Calibri" pitchFamily="34" charset="0"/>
+                <a:ea typeface="Calibri" pitchFamily="34" charset="-122"/>
+                <a:cs typeface="Calibri" pitchFamily="34" charset="-120"/>
+              </a:rPr>
+              <a:t>• </a:t>
+            </a:r>
+            <a:r>
+              <a:rPr lang="en-US" sz="1200" dirty="0"/>
+              <a:t>Does lower customer satisfaction score significantly increase the probability of churn, and if so, how much does each unit decrease in satisfaction affect churn odds</a:t>
+            </a:r>
+          </a:p>
+        </p:txBody>
+      </p:sp>
+      <p:sp>
+        <p:nvSpPr>
+          <p:cNvPr id="10" name="Text 8">
+            <a:extLst>
+              <a:ext uri="{FF2B5EF4-FFF2-40B4-BE49-F238E27FC236}">
+                <a16:creationId xmlns:a16="http://schemas.microsoft.com/office/drawing/2014/main" id="{C5DAAACB-C420-CE8A-9CBC-65478B0FB6AC}"/>
+              </a:ext>
+            </a:extLst>
+          </p:cNvPr>
+          <p:cNvSpPr/>
+          <p:nvPr/>
+        </p:nvSpPr>
+        <p:spPr>
+          <a:xfrm>
+            <a:off x="524436" y="2938626"/>
+            <a:ext cx="8322654" cy="347472"/>
+          </a:xfrm>
+          <a:prstGeom prst="rect">
+            <a:avLst/>
+          </a:prstGeom>
+          <a:noFill/>
+          <a:ln/>
+        </p:spPr>
+        <p:txBody>
+          <a:bodyPr wrap="square" lIns="0" tIns="0" rIns="0" bIns="0" rtlCol="0" anchor="t"/>
+          <a:lstStyle/>
+          <a:p>
+            <a:r>
+              <a:rPr lang="en-US" sz="1200" b="1" dirty="0">
+                <a:solidFill>
+                  <a:srgbClr val="E84A5F"/>
+                </a:solidFill>
+                <a:latin typeface="Calibri" pitchFamily="34" charset="0"/>
+                <a:ea typeface="Calibri" pitchFamily="34" charset="-122"/>
+                <a:cs typeface="Calibri" pitchFamily="34" charset="-120"/>
+              </a:rPr>
+              <a:t>• </a:t>
+            </a:r>
+            <a:r>
+              <a:rPr lang="en-US" sz="1200" dirty="0"/>
+              <a:t>Is the number of support tickets submitted a significant predictor of churn, indicating unresolved customer friction or dissatisfaction with the product experience?</a:t>
+            </a:r>
+          </a:p>
+        </p:txBody>
+      </p:sp>
+      <p:sp>
+        <p:nvSpPr>
+          <p:cNvPr id="11" name="Text 9">
+            <a:extLst>
+              <a:ext uri="{FF2B5EF4-FFF2-40B4-BE49-F238E27FC236}">
+                <a16:creationId xmlns:a16="http://schemas.microsoft.com/office/drawing/2014/main" id="{B4C10D00-9567-2C2B-D6A2-1E3372D6074D}"/>
+              </a:ext>
+            </a:extLst>
+          </p:cNvPr>
+          <p:cNvSpPr/>
+          <p:nvPr/>
+        </p:nvSpPr>
+        <p:spPr>
+          <a:xfrm>
+            <a:off x="515023" y="3364992"/>
+            <a:ext cx="8427272" cy="347472"/>
+          </a:xfrm>
+          <a:prstGeom prst="rect">
+            <a:avLst/>
+          </a:prstGeom>
+          <a:noFill/>
+          <a:ln/>
+        </p:spPr>
+        <p:txBody>
+          <a:bodyPr wrap="square" lIns="0" tIns="0" rIns="0" bIns="0" rtlCol="0" anchor="t"/>
+          <a:lstStyle/>
+          <a:p>
+            <a:r>
+              <a:rPr lang="en-US" sz="1200" b="1" dirty="0">
+                <a:solidFill>
+                  <a:srgbClr val="E84A5F"/>
+                </a:solidFill>
+                <a:latin typeface="Calibri" pitchFamily="34" charset="0"/>
+                <a:ea typeface="Calibri" pitchFamily="34" charset="-122"/>
+                <a:cs typeface="Calibri" pitchFamily="34" charset="-120"/>
+              </a:rPr>
+              <a:t>• </a:t>
+            </a:r>
+            <a:r>
+              <a:rPr lang="en-US" sz="1200" dirty="0"/>
+              <a:t>Does increased recency of disengagement — measured by days elapsed since last login — significantly predict churn, functioning as an early warning signal for customer at-risk status?</a:t>
+            </a:r>
+          </a:p>
+          <a:p>
+            <a:br>
+              <a:rPr lang="en-US" sz="1200" dirty="0"/>
+            </a:br>
+            <a:endParaRPr lang="en-US" sz="1150" dirty="0"/>
+          </a:p>
+        </p:txBody>
+      </p:sp>
+      <p:sp>
+        <p:nvSpPr>
+          <p:cNvPr id="12" name="Text 10">
+            <a:extLst>
+              <a:ext uri="{FF2B5EF4-FFF2-40B4-BE49-F238E27FC236}">
+                <a16:creationId xmlns:a16="http://schemas.microsoft.com/office/drawing/2014/main" id="{B23B402E-DF91-01B9-C5CA-808B276D64BC}"/>
+              </a:ext>
+            </a:extLst>
+          </p:cNvPr>
+          <p:cNvSpPr/>
+          <p:nvPr/>
+        </p:nvSpPr>
+        <p:spPr>
+          <a:xfrm>
+            <a:off x="548640" y="3712464"/>
+            <a:ext cx="4846320" cy="347472"/>
+          </a:xfrm>
+          <a:prstGeom prst="rect">
+            <a:avLst/>
+          </a:prstGeom>
+          <a:noFill/>
+          <a:ln/>
+        </p:spPr>
+        <p:txBody>
+          <a:bodyPr wrap="square" lIns="0" tIns="0" rIns="0" bIns="0" rtlCol="0" anchor="t"/>
+          <a:lstStyle/>
+          <a:p>
+            <a:pPr marL="0" indent="0">
+              <a:buNone/>
+            </a:pPr>
+            <a:endParaRPr lang="en-US" sz="1150" dirty="0"/>
+          </a:p>
+        </p:txBody>
+      </p:sp>
+      <p:sp>
+        <p:nvSpPr>
+          <p:cNvPr id="15" name="Text 13">
+            <a:extLst>
+              <a:ext uri="{FF2B5EF4-FFF2-40B4-BE49-F238E27FC236}">
+                <a16:creationId xmlns:a16="http://schemas.microsoft.com/office/drawing/2014/main" id="{7530EB71-D526-CA5F-BA82-8F908E7ADCE3}"/>
+              </a:ext>
+            </a:extLst>
+          </p:cNvPr>
+          <p:cNvSpPr/>
+          <p:nvPr/>
+        </p:nvSpPr>
+        <p:spPr>
+          <a:xfrm>
+            <a:off x="525779" y="3858768"/>
+            <a:ext cx="8328033" cy="347472"/>
+          </a:xfrm>
+          <a:prstGeom prst="rect">
+            <a:avLst/>
+          </a:prstGeom>
+          <a:noFill/>
+          <a:ln/>
+        </p:spPr>
+        <p:txBody>
+          <a:bodyPr wrap="square" lIns="0" tIns="0" rIns="0" bIns="0" rtlCol="0" anchor="t"/>
+          <a:lstStyle/>
+          <a:p>
+            <a:r>
+              <a:rPr lang="en-US" sz="1200" b="1" dirty="0">
+                <a:solidFill>
+                  <a:srgbClr val="E84A5F"/>
+                </a:solidFill>
+                <a:latin typeface="Calibri" pitchFamily="34" charset="0"/>
+                <a:ea typeface="Calibri" pitchFamily="34" charset="-122"/>
+                <a:cs typeface="Calibri" pitchFamily="34" charset="-120"/>
+              </a:rPr>
+              <a:t>•</a:t>
+            </a:r>
+            <a:r>
+              <a:rPr lang="en-US" sz="1200" dirty="0"/>
+              <a:t>Does customer tenure (months subscribed) reduce churn probability, and does this protective effect of loyalty persist after controlling for other factors?</a:t>
+            </a:r>
+          </a:p>
+        </p:txBody>
+      </p:sp>
+      <p:sp>
+        <p:nvSpPr>
+          <p:cNvPr id="20" name="Text 17">
+            <a:extLst>
+              <a:ext uri="{FF2B5EF4-FFF2-40B4-BE49-F238E27FC236}">
+                <a16:creationId xmlns:a16="http://schemas.microsoft.com/office/drawing/2014/main" id="{D80BB8DA-816E-E971-7E15-557D9A4C9CA7}"/>
+              </a:ext>
+            </a:extLst>
+          </p:cNvPr>
+          <p:cNvSpPr/>
+          <p:nvPr/>
+        </p:nvSpPr>
+        <p:spPr>
+          <a:xfrm>
+            <a:off x="5577840" y="4206240"/>
+            <a:ext cx="1572768" cy="685800"/>
+          </a:xfrm>
+          <a:prstGeom prst="rect">
+            <a:avLst/>
+          </a:prstGeom>
+          <a:noFill/>
+          <a:ln/>
+        </p:spPr>
+        <p:txBody>
+          <a:bodyPr wrap="square" lIns="0" tIns="0" rIns="0" bIns="0" rtlCol="0" anchor="ctr"/>
+          <a:lstStyle/>
+          <a:p>
+            <a:pPr marL="0" indent="0" algn="ctr">
+              <a:buNone/>
+            </a:pPr>
+            <a:r>
+              <a:rPr lang="en-US" sz="1050" b="1" dirty="0">
+                <a:solidFill>
+                  <a:srgbClr val="FFFFFF"/>
+                </a:solidFill>
+                <a:latin typeface="Calibri" pitchFamily="34" charset="0"/>
+                <a:ea typeface="Calibri" pitchFamily="34" charset="-122"/>
+                <a:cs typeface="Calibri" pitchFamily="34" charset="-120"/>
+              </a:rPr>
+              <a:t>10,216</a:t>
+            </a:r>
+            <a:endParaRPr lang="en-US" sz="1050" dirty="0"/>
+          </a:p>
+          <a:p>
+            <a:pPr marL="0" indent="0" algn="ctr">
+              <a:buNone/>
+            </a:pPr>
+            <a:r>
+              <a:rPr lang="en-US" sz="1050" b="1" dirty="0">
+                <a:solidFill>
+                  <a:srgbClr val="FFFFFF"/>
+                </a:solidFill>
+                <a:latin typeface="Calibri" pitchFamily="34" charset="0"/>
+                <a:ea typeface="Calibri" pitchFamily="34" charset="-122"/>
+                <a:cs typeface="Calibri" pitchFamily="34" charset="-120"/>
+              </a:rPr>
+              <a:t>Retained (68.1%)</a:t>
+            </a:r>
+            <a:endParaRPr lang="en-US" sz="1050" dirty="0"/>
+          </a:p>
+        </p:txBody>
+      </p:sp>
+      <p:sp>
+        <p:nvSpPr>
+          <p:cNvPr id="22" name="Text 19">
+            <a:extLst>
+              <a:ext uri="{FF2B5EF4-FFF2-40B4-BE49-F238E27FC236}">
+                <a16:creationId xmlns:a16="http://schemas.microsoft.com/office/drawing/2014/main" id="{C2D43245-546A-31C7-0316-D2C48663D54F}"/>
+              </a:ext>
+            </a:extLst>
+          </p:cNvPr>
+          <p:cNvSpPr/>
+          <p:nvPr/>
+        </p:nvSpPr>
+        <p:spPr>
+          <a:xfrm>
+            <a:off x="7260336" y="4206240"/>
+            <a:ext cx="1600200" cy="685800"/>
+          </a:xfrm>
+          <a:prstGeom prst="rect">
+            <a:avLst/>
+          </a:prstGeom>
+          <a:noFill/>
+          <a:ln/>
+        </p:spPr>
+        <p:txBody>
+          <a:bodyPr wrap="square" lIns="0" tIns="0" rIns="0" bIns="0" rtlCol="0" anchor="ctr"/>
+          <a:lstStyle/>
+          <a:p>
+            <a:pPr marL="0" indent="0" algn="ctr">
+              <a:buNone/>
+            </a:pPr>
+            <a:r>
+              <a:rPr lang="en-US" sz="1050" b="1" dirty="0">
+                <a:solidFill>
+                  <a:srgbClr val="FFFFFF"/>
+                </a:solidFill>
+                <a:latin typeface="Calibri" pitchFamily="34" charset="0"/>
+                <a:ea typeface="Calibri" pitchFamily="34" charset="-122"/>
+                <a:cs typeface="Calibri" pitchFamily="34" charset="-120"/>
+              </a:rPr>
+              <a:t>4,74</a:t>
+            </a:r>
+            <a:endParaRPr lang="en-US" sz="1050" dirty="0"/>
+          </a:p>
+          <a:p>
+            <a:pPr marL="0" indent="0" algn="ctr">
+              <a:buNone/>
+            </a:pPr>
+            <a:r>
+              <a:rPr lang="en-US" sz="1050" b="1" dirty="0">
+                <a:solidFill>
+                  <a:srgbClr val="FFFFFF"/>
+                </a:solidFill>
+                <a:latin typeface="Calibri" pitchFamily="34" charset="0"/>
+                <a:ea typeface="Calibri" pitchFamily="34" charset="-122"/>
+                <a:cs typeface="Calibri" pitchFamily="34" charset="-120"/>
+              </a:rPr>
+              <a:t>Churned (31.9%)</a:t>
+            </a:r>
+            <a:endParaRPr lang="en-US" sz="1050" dirty="0"/>
+          </a:p>
+        </p:txBody>
+      </p:sp>
+      <p:sp>
+        <p:nvSpPr>
+          <p:cNvPr id="26" name="TextBox 25">
+            <a:extLst>
+              <a:ext uri="{FF2B5EF4-FFF2-40B4-BE49-F238E27FC236}">
+                <a16:creationId xmlns:a16="http://schemas.microsoft.com/office/drawing/2014/main" id="{1AD2D180-291D-90E3-9D44-90735C439DFA}"/>
+              </a:ext>
+            </a:extLst>
+          </p:cNvPr>
+          <p:cNvSpPr txBox="1"/>
+          <p:nvPr/>
+        </p:nvSpPr>
+        <p:spPr>
+          <a:xfrm>
+            <a:off x="435684" y="2398067"/>
+            <a:ext cx="8159676" cy="461665"/>
+          </a:xfrm>
+          <a:prstGeom prst="rect">
+            <a:avLst/>
+          </a:prstGeom>
+          <a:noFill/>
+        </p:spPr>
+        <p:txBody>
+          <a:bodyPr wrap="square">
+            <a:spAutoFit/>
+          </a:bodyPr>
+          <a:lstStyle/>
+          <a:p>
+            <a:r>
+              <a:rPr lang="en-US" sz="1200" b="1" dirty="0">
+                <a:solidFill>
+                  <a:srgbClr val="E84A5F"/>
+                </a:solidFill>
+                <a:latin typeface="Calibri" pitchFamily="34" charset="0"/>
+                <a:ea typeface="Calibri" pitchFamily="34" charset="-122"/>
+                <a:cs typeface="Calibri" pitchFamily="34" charset="-120"/>
+              </a:rPr>
+              <a:t>• </a:t>
+            </a:r>
+            <a:r>
+              <a:rPr lang="en-US" sz="1200" dirty="0"/>
+              <a:t>Do customers on longer-term (yearly) contracts exhibit significantly lower churn rates compared to those on monthly rolling contracts?</a:t>
+            </a:r>
+            <a:endParaRPr lang="en-GB" sz="1200" dirty="0">
+              <a:latin typeface="Calibri" pitchFamily="34" charset="0"/>
+              <a:ea typeface="Calibri" pitchFamily="34" charset="-122"/>
+              <a:cs typeface="Calibri" pitchFamily="34" charset="-120"/>
+            </a:endParaRPr>
+          </a:p>
+        </p:txBody>
+      </p:sp>
+    </p:spTree>
+    <p:extLst>
+      <p:ext uri="{BB962C8B-B14F-4D97-AF65-F5344CB8AC3E}">
+        <p14:creationId xmlns:p14="http://schemas.microsoft.com/office/powerpoint/2010/main" val="1352001998"/>
+      </p:ext>
+    </p:extLst>
+  </p:cSld>
+  <p:clrMapOvr>
+    <a:masterClrMapping/>
+  </p:clrMapOvr>
+</p:sld>
+</file>
+
+<file path=ppt/slides/slide5.xml><?xml version="1.0" encoding="utf-8"?>
+<p:sld xmlns:a="http://schemas.openxmlformats.org/drawingml/2006/main" xmlns:r="http://schemas.openxmlformats.org/officeDocument/2006/relationships" xmlns:p="http://schemas.openxmlformats.org/presentationml/2006/main">
   <p:cSld name="Slide 4">
     <p:bg>
       <p:bgPr>
@@ -16239,6 +17684,85 @@
           </a:p>
         </p:txBody>
       </p:sp>
+      <p:sp>
+        <p:nvSpPr>
+          <p:cNvPr id="34" name="TextBox 33">
+            <a:extLst>
+              <a:ext uri="{FF2B5EF4-FFF2-40B4-BE49-F238E27FC236}">
+                <a16:creationId xmlns:a16="http://schemas.microsoft.com/office/drawing/2014/main" id="{2D87D70C-44D5-980C-2553-4DD489175FB7}"/>
+              </a:ext>
+            </a:extLst>
+          </p:cNvPr>
+          <p:cNvSpPr txBox="1"/>
+          <p:nvPr/>
+        </p:nvSpPr>
+        <p:spPr>
+          <a:xfrm>
+            <a:off x="430306" y="3739896"/>
+            <a:ext cx="4572000" cy="292388"/>
+          </a:xfrm>
+          <a:prstGeom prst="rect">
+            <a:avLst/>
+          </a:prstGeom>
+          <a:noFill/>
+        </p:spPr>
+        <p:txBody>
+          <a:bodyPr wrap="square">
+            <a:spAutoFit/>
+          </a:bodyPr>
+          <a:lstStyle/>
+          <a:p>
+            <a:pPr marL="0" indent="0">
+              <a:buNone/>
+            </a:pPr>
+            <a:r>
+              <a:rPr lang="en-US" altLang="zh-CN" sz="1300" b="1" dirty="0">
+                <a:solidFill>
+                  <a:srgbClr val="1C4B82"/>
+                </a:solidFill>
+                <a:latin typeface="Calibri" pitchFamily="34" charset="0"/>
+                <a:ea typeface="Calibri" pitchFamily="34" charset="-122"/>
+                <a:cs typeface="Calibri" pitchFamily="34" charset="-120"/>
+              </a:rPr>
+              <a:t>Data</a:t>
+            </a:r>
+            <a:r>
+              <a:rPr lang="zh-CN" altLang="en-US" sz="1300" b="1" dirty="0">
+                <a:solidFill>
+                  <a:srgbClr val="1C4B82"/>
+                </a:solidFill>
+                <a:latin typeface="Calibri" pitchFamily="34" charset="0"/>
+                <a:ea typeface="Calibri" pitchFamily="34" charset="-122"/>
+                <a:cs typeface="Calibri" pitchFamily="34" charset="-120"/>
+              </a:rPr>
+              <a:t> </a:t>
+            </a:r>
+            <a:r>
+              <a:rPr lang="en-US" altLang="zh-CN" sz="1300" b="1" dirty="0">
+                <a:solidFill>
+                  <a:srgbClr val="1C4B82"/>
+                </a:solidFill>
+                <a:latin typeface="Calibri" pitchFamily="34" charset="0"/>
+                <a:ea typeface="Calibri" pitchFamily="34" charset="-122"/>
+                <a:cs typeface="Calibri" pitchFamily="34" charset="-120"/>
+              </a:rPr>
+              <a:t>Description</a:t>
+            </a:r>
+            <a:r>
+              <a:rPr lang="en-GB" altLang="zh-CN" sz="1300" b="1" dirty="0">
+                <a:solidFill>
+                  <a:srgbClr val="1C4B82"/>
+                </a:solidFill>
+                <a:latin typeface="Calibri" pitchFamily="34" charset="0"/>
+                <a:ea typeface="Calibri" pitchFamily="34" charset="-122"/>
+                <a:cs typeface="Calibri" pitchFamily="34" charset="-120"/>
+              </a:rPr>
+              <a:t>: See appendix</a:t>
+            </a:r>
+            <a:endParaRPr lang="en-US" sz="1300" dirty="0"/>
+          </a:p>
+        </p:txBody>
+      </p:sp>
     </p:spTree>
   </p:cSld>
   <p:clrMapOvr>
@@ -16247,7 +17771,7 @@
 </p:sld>
 </file>
 
-<file path=ppt/slides/slide5.xml><?xml version="1.0" encoding="utf-8"?>
+<file path=ppt/slides/slide6.xml><?xml version="1.0" encoding="utf-8"?>
 <p:sld xmlns:a="http://schemas.openxmlformats.org/drawingml/2006/main" xmlns:r="http://schemas.openxmlformats.org/officeDocument/2006/relationships" xmlns:p="http://schemas.openxmlformats.org/presentationml/2006/main">
   <p:cSld name="Slide 5">
     <p:bg>
@@ -17011,7 +18535,40 @@
                 <a:ea typeface="Calibri" pitchFamily="34" charset="-122"/>
                 <a:cs typeface="Calibri" pitchFamily="34" charset="-120"/>
               </a:rPr>
-              <a:t>Annual contracts → 76% lower churn odds vs monthly</a:t>
+              <a:t>Annual contracts → 76% lower churn odds </a:t>
+            </a:r>
+            <a:r>
+              <a:rPr lang="en-US" altLang="zh-CN" sz="1100" dirty="0">
+                <a:solidFill>
+                  <a:srgbClr val="1A1A2E"/>
+                </a:solidFill>
+                <a:latin typeface="Calibri" pitchFamily="34" charset="0"/>
+                <a:ea typeface="Calibri" pitchFamily="34" charset="-122"/>
+                <a:cs typeface="Calibri" pitchFamily="34" charset="-120"/>
+              </a:rPr>
+              <a:t>compared to</a:t>
+            </a:r>
+            <a:r>
+              <a:rPr lang="en-US" sz="1100" dirty="0">
+                <a:solidFill>
+                  <a:srgbClr val="1A1A2E"/>
+                </a:solidFill>
+                <a:latin typeface="Calibri" pitchFamily="34" charset="0"/>
+                <a:ea typeface="Calibri" pitchFamily="34" charset="-122"/>
+                <a:cs typeface="Calibri" pitchFamily="34" charset="-120"/>
+              </a:rPr>
+              <a:t> monthly </a:t>
+            </a:r>
+            <a:r>
+              <a:rPr lang="en-US" altLang="zh-CN" sz="1100" dirty="0">
+                <a:solidFill>
+                  <a:srgbClr val="1A1A2E"/>
+                </a:solidFill>
+                <a:latin typeface="Calibri" pitchFamily="34" charset="0"/>
+                <a:ea typeface="Calibri" pitchFamily="34" charset="-122"/>
+                <a:cs typeface="Calibri" pitchFamily="34" charset="-120"/>
+              </a:rPr>
+              <a:t>contracts</a:t>
             </a:r>
             <a:endParaRPr lang="en-US" sz="1100" dirty="0"/>
           </a:p>
@@ -17651,7 +19208,7 @@
                 <a:ea typeface="Calibri" pitchFamily="34" charset="-122"/>
                 <a:cs typeface="Calibri" pitchFamily="34" charset="-120"/>
               </a:rPr>
-              <a:t>Each inactive day increases churn odds by 9%</a:t>
+              <a:t>Each inactive day increases churn odds by 10%</a:t>
             </a:r>
             <a:endParaRPr lang="en-US" sz="1100" dirty="0"/>
           </a:p>
@@ -17977,8 +19534,8 @@
           </a:p>
         </p:txBody>
       </p:sp>
-      <mc:AlternateContent xmlns:mc="http://schemas.openxmlformats.org/markup-compatibility/2006">
-        <mc:Choice xmlns:a14="http://schemas.microsoft.com/office/drawing/2010/main" Requires="a14">
+      <mc:AlternateContent xmlns:mc="http://schemas.openxmlformats.org/markup-compatibility/2006" xmlns:a14="http://schemas.microsoft.com/office/drawing/2010/main">
+        <mc:Choice Requires="a14">
           <p:sp>
             <p:nvSpPr>
               <p:cNvPr id="45" name="TextBox 44">
@@ -18135,7 +19692,7 @@
             </p:txBody>
           </p:sp>
         </mc:Choice>
-        <mc:Fallback>
+        <mc:Fallback xmlns="">
           <p:sp>
             <p:nvSpPr>
               <p:cNvPr id="45" name="TextBox 44">
@@ -18188,7 +19745,7 @@
 </p:sld>
 </file>
 
-<file path=ppt/slides/slide6.xml><?xml version="1.0" encoding="utf-8"?>
+<file path=ppt/slides/slide7.xml><?xml version="1.0" encoding="utf-8"?>
 <p:sld xmlns:a="http://schemas.openxmlformats.org/drawingml/2006/main" xmlns:r="http://schemas.openxmlformats.org/officeDocument/2006/relationships" xmlns:p="http://schemas.openxmlformats.org/presentationml/2006/main">
   <p:cSld name="Slide 6">
     <p:bg>
@@ -18858,7 +20415,7 @@
 </p:sld>
 </file>
 
-<file path=ppt/slides/slide7.xml><?xml version="1.0" encoding="utf-8"?>
+<file path=ppt/slides/slide8.xml><?xml version="1.0" encoding="utf-8"?>
 <p:sld xmlns:a="http://schemas.openxmlformats.org/drawingml/2006/main" xmlns:r="http://schemas.openxmlformats.org/officeDocument/2006/relationships" xmlns:p="http://schemas.openxmlformats.org/presentationml/2006/main">
   <p:cSld name="Slide 7">
     <p:bg>
@@ -18982,7 +20539,7 @@
                 <a:ea typeface="Calibri" pitchFamily="34" charset="-122"/>
                 <a:cs typeface="Calibri" pitchFamily="34" charset="-120"/>
               </a:rPr>
-              <a:t>Contract Structure &amp; Support Interactions</a:t>
+              <a:t>Contract Type &amp; Support Tickets</a:t>
             </a:r>
             <a:endParaRPr lang="en-US" sz="2600" dirty="0"/>
           </a:p>
@@ -19737,7 +21294,7 @@
 </p:sld>
 </file>
 
-<file path=ppt/slides/slide8.xml><?xml version="1.0" encoding="utf-8"?>
+<file path=ppt/slides/slide9.xml><?xml version="1.0" encoding="utf-8"?>
 <p:sld xmlns:a="http://schemas.openxmlformats.org/drawingml/2006/main" xmlns:r="http://schemas.openxmlformats.org/officeDocument/2006/relationships" xmlns:p="http://schemas.openxmlformats.org/presentationml/2006/main">
   <p:cSld name="Slide 8">
     <p:bg>
@@ -19861,7 +21418,29 @@
                 <a:ea typeface="Calibri" pitchFamily="34" charset="-122"/>
                 <a:cs typeface="Calibri" pitchFamily="34" charset="-120"/>
               </a:rPr>
-              <a:t>Login Inactivity &amp; Customer Tenure</a:t>
+              <a:t>Login </a:t>
+            </a:r>
+            <a:r>
+              <a:rPr lang="en-US" altLang="zh-CN" sz="2600" b="1" dirty="0">
+                <a:solidFill>
+                  <a:srgbClr val="FFFFFF"/>
+                </a:solidFill>
+                <a:latin typeface="Calibri" pitchFamily="34" charset="0"/>
+                <a:ea typeface="Calibri" pitchFamily="34" charset="-122"/>
+                <a:cs typeface="Calibri" pitchFamily="34" charset="-120"/>
+              </a:rPr>
+              <a:t>Recency</a:t>
+            </a:r>
+            <a:r>
+              <a:rPr lang="en-US" sz="2600" b="1" dirty="0">
+                <a:solidFill>
+                  <a:srgbClr val="FFFFFF"/>
+                </a:solidFill>
+                <a:latin typeface="Calibri" pitchFamily="34" charset="0"/>
+                <a:ea typeface="Calibri" pitchFamily="34" charset="-122"/>
+                <a:cs typeface="Calibri" pitchFamily="34" charset="-120"/>
+              </a:rPr>
+              <a:t> &amp; Customer Tenure</a:t>
             </a:r>
             <a:endParaRPr lang="en-US" sz="2600" dirty="0"/>
           </a:p>
@@ -20807,628 +22386,6 @@
               <a:t>=-0.050  |  OR=0.951 per month  |  p&lt;0.001</a:t>
             </a:r>
             <a:endParaRPr lang="en-US" sz="1000" dirty="0"/>
-          </a:p>
-        </p:txBody>
-      </p:sp>
-    </p:spTree>
-  </p:cSld>
-  <p:clrMapOvr>
-    <a:masterClrMapping/>
-  </p:clrMapOvr>
-</p:sld>
-</file>
-
-<file path=ppt/slides/slide9.xml><?xml version="1.0" encoding="utf-8"?>
-<p:sld xmlns:a="http://schemas.openxmlformats.org/drawingml/2006/main" xmlns:r="http://schemas.openxmlformats.org/officeDocument/2006/relationships" xmlns:p="http://schemas.openxmlformats.org/presentationml/2006/main">
-  <p:cSld name="Slide 9">
-    <p:bg>
-      <p:bgPr>
-        <a:solidFill>
-          <a:srgbClr val="FAFBFD"/>
-        </a:solidFill>
-        <a:effectLst/>
-      </p:bgPr>
-    </p:bg>
-    <p:spTree>
-      <p:nvGrpSpPr>
-        <p:cNvPr id="1" name=""/>
-        <p:cNvGrpSpPr/>
-        <p:nvPr/>
-      </p:nvGrpSpPr>
-      <p:grpSpPr>
-        <a:xfrm>
-          <a:off x="0" y="0"/>
-          <a:ext cx="0" cy="0"/>
-          <a:chOff x="0" y="0"/>
-          <a:chExt cx="0" cy="0"/>
-        </a:xfrm>
-      </p:grpSpPr>
-      <p:sp>
-        <p:nvSpPr>
-          <p:cNvPr id="2" name="Shape 0"/>
-          <p:cNvSpPr/>
-          <p:nvPr/>
-        </p:nvSpPr>
-        <p:spPr>
-          <a:xfrm>
-            <a:off x="0" y="0"/>
-            <a:ext cx="9144000" cy="1005840"/>
-          </a:xfrm>
-          <a:prstGeom prst="rect">
-            <a:avLst/>
-          </a:prstGeom>
-          <a:solidFill>
-            <a:srgbClr val="1C4B82"/>
-          </a:solidFill>
-          <a:ln/>
-        </p:spPr>
-        <p:txBody>
-          <a:bodyPr/>
-          <a:lstStyle/>
-          <a:p>
-            <a:endParaRPr lang="en-GB"/>
-          </a:p>
-        </p:txBody>
-      </p:sp>
-      <p:sp>
-        <p:nvSpPr>
-          <p:cNvPr id="3" name="Text 1"/>
-          <p:cNvSpPr/>
-          <p:nvPr/>
-        </p:nvSpPr>
-        <p:spPr>
-          <a:xfrm>
-            <a:off x="365760" y="137160"/>
-            <a:ext cx="8412480" cy="777240"/>
-          </a:xfrm>
-          <a:prstGeom prst="rect">
-            <a:avLst/>
-          </a:prstGeom>
-          <a:noFill/>
-          <a:ln/>
-        </p:spPr>
-        <p:txBody>
-          <a:bodyPr wrap="square" lIns="0" tIns="0" rIns="0" bIns="0" rtlCol="0" anchor="ctr"/>
-          <a:lstStyle/>
-          <a:p>
-            <a:pPr marL="0" indent="0">
-              <a:buNone/>
-            </a:pPr>
-            <a:r>
-              <a:rPr lang="en-US" sz="2800" b="1" dirty="0">
-                <a:solidFill>
-                  <a:srgbClr val="FFFFFF"/>
-                </a:solidFill>
-                <a:latin typeface="Calibri" pitchFamily="34" charset="0"/>
-                <a:ea typeface="Calibri" pitchFamily="34" charset="-122"/>
-                <a:cs typeface="Calibri" pitchFamily="34" charset="-120"/>
-              </a:rPr>
-              <a:t>Model Summary</a:t>
-            </a:r>
-            <a:endParaRPr lang="en-US" sz="2800" dirty="0"/>
-          </a:p>
-        </p:txBody>
-      </p:sp>
-      <p:sp>
-        <p:nvSpPr>
-          <p:cNvPr id="4" name="Text 2"/>
-          <p:cNvSpPr/>
-          <p:nvPr/>
-        </p:nvSpPr>
-        <p:spPr>
-          <a:xfrm>
-            <a:off x="274320" y="1051560"/>
-            <a:ext cx="8595360" cy="347472"/>
-          </a:xfrm>
-          <a:prstGeom prst="rect">
-            <a:avLst/>
-          </a:prstGeom>
-          <a:noFill/>
-          <a:ln/>
-        </p:spPr>
-        <p:txBody>
-          <a:bodyPr wrap="square" lIns="0" tIns="0" rIns="0" bIns="0" rtlCol="0" anchor="ctr"/>
-          <a:lstStyle/>
-          <a:p>
-            <a:pPr marL="0" indent="0" algn="ctr">
-              <a:buNone/>
-            </a:pPr>
-            <a:r>
-              <a:rPr lang="en-US" sz="1400" b="1" dirty="0">
-                <a:solidFill>
-                  <a:srgbClr val="1C4B82"/>
-                </a:solidFill>
-                <a:latin typeface="Calibri" pitchFamily="34" charset="0"/>
-                <a:ea typeface="Calibri" pitchFamily="34" charset="-122"/>
-                <a:cs typeface="Calibri" pitchFamily="34" charset="-120"/>
-              </a:rPr>
-              <a:t>Predictor Coefficients — Full Logistic Regression Model</a:t>
-            </a:r>
-            <a:endParaRPr lang="en-US" sz="1400" dirty="0"/>
-          </a:p>
-        </p:txBody>
-      </p:sp>
-      <p:pic>
-        <p:nvPicPr>
-          <p:cNvPr id="5" name="Image 0" descr="preencoded.png"/>
-          <p:cNvPicPr>
-            <a:picLocks noChangeAspect="1"/>
-          </p:cNvPicPr>
-          <p:nvPr/>
-        </p:nvPicPr>
-        <p:blipFill>
-          <a:blip r:embed="rId3"/>
-          <a:stretch>
-            <a:fillRect/>
-          </a:stretch>
-        </p:blipFill>
-        <p:spPr>
-          <a:xfrm>
-            <a:off x="548640" y="1417320"/>
-            <a:ext cx="5486400" cy="3566160"/>
-          </a:xfrm>
-          <a:prstGeom prst="rect">
-            <a:avLst/>
-          </a:prstGeom>
-        </p:spPr>
-      </p:pic>
-      <p:sp>
-        <p:nvSpPr>
-          <p:cNvPr id="6" name="Shape 3"/>
-          <p:cNvSpPr/>
-          <p:nvPr/>
-        </p:nvSpPr>
-        <p:spPr>
-          <a:xfrm>
-            <a:off x="6263640" y="1417320"/>
-            <a:ext cx="2651760" cy="3566160"/>
-          </a:xfrm>
-          <a:prstGeom prst="rect">
-            <a:avLst/>
-          </a:prstGeom>
-          <a:solidFill>
-            <a:srgbClr val="FFFFFF"/>
-          </a:solidFill>
-          <a:ln w="12700">
-            <a:solidFill>
-              <a:srgbClr val="CBD5E1"/>
-            </a:solidFill>
-            <a:prstDash val="solid"/>
-          </a:ln>
-          <a:effectLst>
-            <a:outerShdw blurRad="101600" dist="38100" dir="8100000" algn="bl" rotWithShape="0">
-              <a:srgbClr val="000000">
-                <a:alpha val="12000"/>
-              </a:srgbClr>
-            </a:outerShdw>
-          </a:effectLst>
-        </p:spPr>
-        <p:txBody>
-          <a:bodyPr/>
-          <a:lstStyle/>
-          <a:p>
-            <a:endParaRPr lang="en-GB"/>
-          </a:p>
-        </p:txBody>
-      </p:sp>
-      <p:sp>
-        <p:nvSpPr>
-          <p:cNvPr id="7" name="Shape 4"/>
-          <p:cNvSpPr/>
-          <p:nvPr/>
-        </p:nvSpPr>
-        <p:spPr>
-          <a:xfrm>
-            <a:off x="6263640" y="1417320"/>
-            <a:ext cx="2651760" cy="384048"/>
-          </a:xfrm>
-          <a:prstGeom prst="rect">
-            <a:avLst/>
-          </a:prstGeom>
-          <a:solidFill>
-            <a:srgbClr val="1C4B82"/>
-          </a:solidFill>
-          <a:ln/>
-        </p:spPr>
-        <p:txBody>
-          <a:bodyPr/>
-          <a:lstStyle/>
-          <a:p>
-            <a:endParaRPr lang="en-GB"/>
-          </a:p>
-        </p:txBody>
-      </p:sp>
-      <p:sp>
-        <p:nvSpPr>
-          <p:cNvPr id="8" name="Text 5"/>
-          <p:cNvSpPr/>
-          <p:nvPr/>
-        </p:nvSpPr>
-        <p:spPr>
-          <a:xfrm>
-            <a:off x="6355080" y="1435608"/>
-            <a:ext cx="2468880" cy="347472"/>
-          </a:xfrm>
-          <a:prstGeom prst="rect">
-            <a:avLst/>
-          </a:prstGeom>
-          <a:noFill/>
-          <a:ln/>
-        </p:spPr>
-        <p:txBody>
-          <a:bodyPr wrap="square" lIns="0" tIns="0" rIns="0" bIns="0" rtlCol="0" anchor="ctr"/>
-          <a:lstStyle/>
-          <a:p>
-            <a:pPr marL="0" indent="0">
-              <a:buNone/>
-            </a:pPr>
-            <a:r>
-              <a:rPr lang="en-US" sz="1200" b="1" dirty="0">
-                <a:solidFill>
-                  <a:srgbClr val="FFFFFF"/>
-                </a:solidFill>
-                <a:latin typeface="Calibri" pitchFamily="34" charset="0"/>
-                <a:ea typeface="Calibri" pitchFamily="34" charset="-122"/>
-                <a:cs typeface="Calibri" pitchFamily="34" charset="-120"/>
-              </a:rPr>
-              <a:t>How to Read</a:t>
-            </a:r>
-            <a:endParaRPr lang="en-US" sz="1200" dirty="0"/>
-          </a:p>
-        </p:txBody>
-      </p:sp>
-      <p:sp>
-        <p:nvSpPr>
-          <p:cNvPr id="9" name="Shape 6"/>
-          <p:cNvSpPr/>
-          <p:nvPr/>
-        </p:nvSpPr>
-        <p:spPr>
-          <a:xfrm>
-            <a:off x="6400800" y="1920240"/>
-            <a:ext cx="201168" cy="347472"/>
-          </a:xfrm>
-          <a:prstGeom prst="rect">
-            <a:avLst/>
-          </a:prstGeom>
-          <a:solidFill>
-            <a:srgbClr val="E84A5F"/>
-          </a:solidFill>
-          <a:ln w="12700">
-            <a:solidFill>
-              <a:srgbClr val="E84A5F"/>
-            </a:solidFill>
-            <a:prstDash val="solid"/>
-          </a:ln>
-        </p:spPr>
-        <p:txBody>
-          <a:bodyPr/>
-          <a:lstStyle/>
-          <a:p>
-            <a:endParaRPr lang="en-GB"/>
-          </a:p>
-        </p:txBody>
-      </p:sp>
-      <p:sp>
-        <p:nvSpPr>
-          <p:cNvPr id="10" name="Text 7"/>
-          <p:cNvSpPr/>
-          <p:nvPr/>
-        </p:nvSpPr>
-        <p:spPr>
-          <a:xfrm>
-            <a:off x="6675120" y="1920240"/>
-            <a:ext cx="2148840" cy="530352"/>
-          </a:xfrm>
-          <a:prstGeom prst="rect">
-            <a:avLst/>
-          </a:prstGeom>
-          <a:noFill/>
-          <a:ln/>
-        </p:spPr>
-        <p:txBody>
-          <a:bodyPr wrap="square" lIns="0" tIns="0" rIns="0" bIns="0" rtlCol="0" anchor="ctr"/>
-          <a:lstStyle/>
-          <a:p>
-            <a:pPr marL="0" indent="0">
-              <a:buNone/>
-            </a:pPr>
-            <a:r>
-              <a:rPr lang="en-US" sz="1050" dirty="0">
-                <a:solidFill>
-                  <a:srgbClr val="1A1A2E"/>
-                </a:solidFill>
-                <a:latin typeface="Calibri" pitchFamily="34" charset="0"/>
-                <a:ea typeface="Calibri" pitchFamily="34" charset="-122"/>
-                <a:cs typeface="Calibri" pitchFamily="34" charset="-120"/>
-              </a:rPr>
-              <a:t>Red bars (positive): predictor increases churn probability</a:t>
-            </a:r>
-            <a:endParaRPr lang="en-US" sz="1050" dirty="0"/>
-          </a:p>
-        </p:txBody>
-      </p:sp>
-      <p:sp>
-        <p:nvSpPr>
-          <p:cNvPr id="11" name="Shape 8"/>
-          <p:cNvSpPr/>
-          <p:nvPr/>
-        </p:nvSpPr>
-        <p:spPr>
-          <a:xfrm>
-            <a:off x="6400800" y="2578608"/>
-            <a:ext cx="201168" cy="347472"/>
-          </a:xfrm>
-          <a:prstGeom prst="rect">
-            <a:avLst/>
-          </a:prstGeom>
-          <a:solidFill>
-            <a:srgbClr val="1C4B82"/>
-          </a:solidFill>
-          <a:ln w="12700">
-            <a:solidFill>
-              <a:srgbClr val="1C4B82"/>
-            </a:solidFill>
-            <a:prstDash val="solid"/>
-          </a:ln>
-        </p:spPr>
-        <p:txBody>
-          <a:bodyPr/>
-          <a:lstStyle/>
-          <a:p>
-            <a:endParaRPr lang="en-GB"/>
-          </a:p>
-        </p:txBody>
-      </p:sp>
-      <p:sp>
-        <p:nvSpPr>
-          <p:cNvPr id="12" name="Text 9"/>
-          <p:cNvSpPr/>
-          <p:nvPr/>
-        </p:nvSpPr>
-        <p:spPr>
-          <a:xfrm>
-            <a:off x="6675120" y="2578608"/>
-            <a:ext cx="2148840" cy="530352"/>
-          </a:xfrm>
-          <a:prstGeom prst="rect">
-            <a:avLst/>
-          </a:prstGeom>
-          <a:noFill/>
-          <a:ln/>
-        </p:spPr>
-        <p:txBody>
-          <a:bodyPr wrap="square" lIns="0" tIns="0" rIns="0" bIns="0" rtlCol="0" anchor="ctr"/>
-          <a:lstStyle/>
-          <a:p>
-            <a:pPr marL="0" indent="0">
-              <a:buNone/>
-            </a:pPr>
-            <a:r>
-              <a:rPr lang="en-US" sz="1050" dirty="0">
-                <a:solidFill>
-                  <a:srgbClr val="1A1A2E"/>
-                </a:solidFill>
-                <a:latin typeface="Calibri" pitchFamily="34" charset="0"/>
-                <a:ea typeface="Calibri" pitchFamily="34" charset="-122"/>
-                <a:cs typeface="Calibri" pitchFamily="34" charset="-120"/>
-              </a:rPr>
-              <a:t>Blue bars (negative): predictor reduces churn probability</a:t>
-            </a:r>
-            <a:endParaRPr lang="en-US" sz="1050" dirty="0"/>
-          </a:p>
-        </p:txBody>
-      </p:sp>
-      <p:sp>
-        <p:nvSpPr>
-          <p:cNvPr id="13" name="Shape 10"/>
-          <p:cNvSpPr/>
-          <p:nvPr/>
-        </p:nvSpPr>
-        <p:spPr>
-          <a:xfrm>
-            <a:off x="6400800" y="3236976"/>
-            <a:ext cx="201168" cy="347472"/>
-          </a:xfrm>
-          <a:prstGeom prst="rect">
-            <a:avLst/>
-          </a:prstGeom>
-          <a:solidFill>
-            <a:srgbClr val="CBD5E1"/>
-          </a:solidFill>
-          <a:ln w="12700">
-            <a:solidFill>
-              <a:srgbClr val="CBD5E1"/>
-            </a:solidFill>
-            <a:prstDash val="solid"/>
-          </a:ln>
-        </p:spPr>
-        <p:txBody>
-          <a:bodyPr/>
-          <a:lstStyle/>
-          <a:p>
-            <a:endParaRPr lang="en-GB"/>
-          </a:p>
-        </p:txBody>
-      </p:sp>
-      <p:sp>
-        <p:nvSpPr>
-          <p:cNvPr id="14" name="Text 11"/>
-          <p:cNvSpPr/>
-          <p:nvPr/>
-        </p:nvSpPr>
-        <p:spPr>
-          <a:xfrm>
-            <a:off x="6675120" y="3236976"/>
-            <a:ext cx="2148840" cy="530352"/>
-          </a:xfrm>
-          <a:prstGeom prst="rect">
-            <a:avLst/>
-          </a:prstGeom>
-          <a:noFill/>
-          <a:ln/>
-        </p:spPr>
-        <p:txBody>
-          <a:bodyPr wrap="square" lIns="0" tIns="0" rIns="0" bIns="0" rtlCol="0" anchor="ctr"/>
-          <a:lstStyle/>
-          <a:p>
-            <a:pPr marL="0" indent="0">
-              <a:buNone/>
-            </a:pPr>
-            <a:r>
-              <a:rPr lang="en-US" sz="1050" dirty="0">
-                <a:solidFill>
-                  <a:srgbClr val="1A1A2E"/>
-                </a:solidFill>
-                <a:latin typeface="Calibri" pitchFamily="34" charset="0"/>
-                <a:ea typeface="Calibri" pitchFamily="34" charset="-122"/>
-                <a:cs typeface="Calibri" pitchFamily="34" charset="-120"/>
-              </a:rPr>
-              <a:t>Transparent bars: not statistically significant (p≥0.05)</a:t>
-            </a:r>
-            <a:endParaRPr lang="en-US" sz="1050" dirty="0"/>
-          </a:p>
-        </p:txBody>
-      </p:sp>
-      <p:sp>
-        <p:nvSpPr>
-          <p:cNvPr id="15" name="Shape 12"/>
-          <p:cNvSpPr/>
-          <p:nvPr/>
-        </p:nvSpPr>
-        <p:spPr>
-          <a:xfrm>
-            <a:off x="6400800" y="3895344"/>
-            <a:ext cx="201168" cy="347472"/>
-          </a:xfrm>
-          <a:prstGeom prst="rect">
-            <a:avLst/>
-          </a:prstGeom>
-          <a:solidFill>
-            <a:srgbClr val="1C4B82"/>
-          </a:solidFill>
-          <a:ln w="12700">
-            <a:solidFill>
-              <a:srgbClr val="1C4B82"/>
-            </a:solidFill>
-            <a:prstDash val="solid"/>
-          </a:ln>
-        </p:spPr>
-        <p:txBody>
-          <a:bodyPr/>
-          <a:lstStyle/>
-          <a:p>
-            <a:endParaRPr lang="en-GB"/>
-          </a:p>
-        </p:txBody>
-      </p:sp>
-      <p:sp>
-        <p:nvSpPr>
-          <p:cNvPr id="16" name="Text 13"/>
-          <p:cNvSpPr/>
-          <p:nvPr/>
-        </p:nvSpPr>
-        <p:spPr>
-          <a:xfrm>
-            <a:off x="6675120" y="3895344"/>
-            <a:ext cx="2148840" cy="530352"/>
-          </a:xfrm>
-          <a:prstGeom prst="rect">
-            <a:avLst/>
-          </a:prstGeom>
-          <a:noFill/>
-          <a:ln/>
-        </p:spPr>
-        <p:txBody>
-          <a:bodyPr wrap="square" lIns="0" tIns="0" rIns="0" bIns="0" rtlCol="0" anchor="ctr"/>
-          <a:lstStyle/>
-          <a:p>
-            <a:pPr marL="0" indent="0">
-              <a:buNone/>
-            </a:pPr>
-            <a:r>
-              <a:rPr lang="en-US" sz="1050" dirty="0">
-                <a:solidFill>
-                  <a:srgbClr val="1A1A2E"/>
-                </a:solidFill>
-                <a:latin typeface="Calibri" pitchFamily="34" charset="0"/>
-                <a:ea typeface="Calibri" pitchFamily="34" charset="-122"/>
-                <a:cs typeface="Calibri" pitchFamily="34" charset="-120"/>
-              </a:rPr>
-              <a:t>Longer bar = stronger effect on churn</a:t>
-            </a:r>
-            <a:endParaRPr lang="en-US" sz="1050" dirty="0"/>
-          </a:p>
-        </p:txBody>
-      </p:sp>
-      <p:sp>
-        <p:nvSpPr>
-          <p:cNvPr id="17" name="Shape 14"/>
-          <p:cNvSpPr/>
-          <p:nvPr/>
-        </p:nvSpPr>
-        <p:spPr>
-          <a:xfrm>
-            <a:off x="6263640" y="4343400"/>
-            <a:ext cx="2651760" cy="640080"/>
-          </a:xfrm>
-          <a:prstGeom prst="rect">
-            <a:avLst/>
-          </a:prstGeom>
-          <a:solidFill>
-            <a:srgbClr val="F0F5FB"/>
-          </a:solidFill>
-          <a:ln w="12700">
-            <a:solidFill>
-              <a:srgbClr val="CBD5E1"/>
-            </a:solidFill>
-            <a:prstDash val="solid"/>
-          </a:ln>
-        </p:spPr>
-        <p:txBody>
-          <a:bodyPr/>
-          <a:lstStyle/>
-          <a:p>
-            <a:endParaRPr lang="en-GB"/>
-          </a:p>
-        </p:txBody>
-      </p:sp>
-      <p:sp>
-        <p:nvSpPr>
-          <p:cNvPr id="18" name="Text 15"/>
-          <p:cNvSpPr/>
-          <p:nvPr/>
-        </p:nvSpPr>
-        <p:spPr>
-          <a:xfrm>
-            <a:off x="6355080" y="4370832"/>
-            <a:ext cx="2468880" cy="548640"/>
-          </a:xfrm>
-          <a:prstGeom prst="rect">
-            <a:avLst/>
-          </a:prstGeom>
-          <a:noFill/>
-          <a:ln/>
-        </p:spPr>
-        <p:txBody>
-          <a:bodyPr wrap="square" lIns="0" tIns="0" rIns="0" bIns="0" rtlCol="0" anchor="ctr"/>
-          <a:lstStyle/>
-          <a:p>
-            <a:pPr marL="0" indent="0">
-              <a:buNone/>
-            </a:pPr>
-            <a:r>
-              <a:rPr lang="en-US" sz="1050" b="1" dirty="0">
-                <a:solidFill>
-                  <a:srgbClr val="1C4B82"/>
-                </a:solidFill>
-                <a:latin typeface="Calibri" pitchFamily="34" charset="0"/>
-                <a:ea typeface="Calibri" pitchFamily="34" charset="-122"/>
-                <a:cs typeface="Calibri" pitchFamily="34" charset="-120"/>
-              </a:rPr>
-              <a:t>7 of 14 predictors are statistically significant. Satisfaction score and contract type are dominant.</a:t>
-            </a:r>
-            <a:endParaRPr lang="en-US" sz="1050" dirty="0"/>
           </a:p>
         </p:txBody>
       </p:sp>
